--- a/기획/몬스터 기획서_EmotionGame.pptx
+++ b/기획/몬스터 기획서_EmotionGame.pptx
@@ -517,6 +517,87 @@
           <inkml:channelProperty channel="F" name="resolution" value="0" units="1/dev"/>
         </inkml:channelProperties>
       </inkml:inkSource>
+      <inkml:timestamp xml:id="ts0" timeString="2026-04-04T14:18:35.054"/>
+    </inkml:context>
+    <inkml:brush xml:id="br0">
+      <inkml:brushProperty name="width" value="0.05" units="cm"/>
+      <inkml:brushProperty name="height" value="0.05" units="cm"/>
+    </inkml:brush>
+  </inkml:definitions>
+  <inkml:trace contextRef="#ctx0" brushRef="#br0">2 1 24575,'-1'87'0,"3"91"0,-2-177 0,0 0 0,1 0 0,-1 0 0,1 0 0,-1 0 0,1-1 0,-1 1 0,1 0 0,0 0 0,-1 0 0,1 0 0,0-1 0,0 1 0,-1 0 0,1-1 0,0 1 0,0 0 0,0-1 0,0 1 0,0-1 0,0 0 0,0 1 0,0-1 0,0 0 0,0 0 0,0 1 0,0-1 0,0 0 0,0 0 0,0 0 0,1 0 0,-1 0 0,0-1 0,0 1 0,0 0 0,0 0 0,0-1 0,0 1 0,2-2 0,53-17 0,-43 14 0,8-2 0,2-2 0,48-9 0,-43 10 0,-25 6 0,1 1 0,-1 0 0,1 0 0,0 0 0,-1 1 0,1-1 0,0 1 0,5 0 0,-7 1 0,0-1 0,0 1 0,0 0 0,-1 0 0,1 0 0,0 0 0,-1 0 0,1 0 0,-1 0 0,1 0 0,-1 1 0,0-1 0,1 0 0,-1 1 0,0-1 0,0 1 0,0 0 0,0-1 0,0 1 0,-1 0 0,2 3 0,1 7 0,0 1 0,0 0 0,-2 0 0,0 0 0,0 1 0,-1-1 0,-1 0 0,-2 17 0,2-27 0,0-1 0,0 1 0,-1 0 0,1 0 0,-1 0 0,0-1 0,0 1 0,0-1 0,0 1 0,0-1 0,0 0 0,-1 0 0,1 0 0,-1 0 0,0 0 0,1 0 0,-1-1 0,-5 3 0,-1 0 0,0 0 0,0 0 0,0-1 0,-18 4 0,14-5-273,0 0 0,1 1 0,0 0 0,-22 9 0</inkml:trace>
+</inkml:ink>
+</file>
+
+<file path=ppt/ink/ink10.xml><?xml version="1.0" encoding="utf-8"?>
+<inkml:ink xmlns:inkml="http://www.w3.org/2003/InkML">
+  <inkml:definitions>
+    <inkml:context xml:id="ctx0">
+      <inkml:inkSource xml:id="inkSrc0">
+        <inkml:traceFormat>
+          <inkml:channel name="X" type="integer" min="-2.14748E9" max="2.14748E9" units="cm"/>
+          <inkml:channel name="Y" type="integer" min="-2.14748E9" max="2.14748E9" units="cm"/>
+          <inkml:channel name="F" type="integer" max="32767" units="dev"/>
+        </inkml:traceFormat>
+        <inkml:channelProperties>
+          <inkml:channelProperty channel="X" name="resolution" value="1000" units="1/cm"/>
+          <inkml:channelProperty channel="Y" name="resolution" value="1000" units="1/cm"/>
+          <inkml:channelProperty channel="F" name="resolution" value="0" units="1/dev"/>
+        </inkml:channelProperties>
+      </inkml:inkSource>
+      <inkml:timestamp xml:id="ts0" timeString="2026-04-04T14:18:57.758"/>
+    </inkml:context>
+    <inkml:brush xml:id="br0">
+      <inkml:brushProperty name="width" value="0.05" units="cm"/>
+      <inkml:brushProperty name="height" value="0.05" units="cm"/>
+    </inkml:brush>
+  </inkml:definitions>
+  <inkml:trace contextRef="#ctx0" brushRef="#br0">591 3 24575,'-53'-1'0,"20"-1"0,-59 6 0,83-3 0,0 1 0,-1 0 0,1 0 0,0 1 0,1 0 0,-1 0 0,0 1 0,1 0 0,0 1 0,-15 11 0,13-9 0,0-1 0,-1 1 0,1-2 0,-1 1 0,-13 3 0,16-6 0,0 0 0,1 0 0,-1 1 0,0 0 0,1 0 0,0 0 0,0 1 0,1 0 0,-1 1 0,1 0 0,0 0 0,-7 9 0,-2 6 0,1 1 0,0 0 0,2 1 0,0 1 0,2 0 0,-14 47 0,16-33 0,1 0 0,1 0 0,1 52 0,5-81 0,0 30 0,7 51 0,-5-79 0,-1 0 0,2-1 0,0 1 0,0-1 0,1 1 0,0-1 0,1 0 0,0-1 0,11 17 0,-12-22 0,1 0 0,-1-1 0,1 1 0,0-1 0,0 0 0,1 0 0,-1 0 0,1-1 0,-1 0 0,1 0 0,10 2 0,67 9 0,-37-12 27,-33-2-375,0 1 0,0 1 0,24 4 0,-21 0-6478</inkml:trace>
+</inkml:ink>
+</file>
+
+<file path=ppt/ink/ink11.xml><?xml version="1.0" encoding="utf-8"?>
+<inkml:ink xmlns:inkml="http://www.w3.org/2003/InkML">
+  <inkml:definitions>
+    <inkml:context xml:id="ctx0">
+      <inkml:inkSource xml:id="inkSrc0">
+        <inkml:traceFormat>
+          <inkml:channel name="X" type="integer" min="-2.14748E9" max="2.14748E9" units="cm"/>
+          <inkml:channel name="Y" type="integer" min="-2.14748E9" max="2.14748E9" units="cm"/>
+          <inkml:channel name="F" type="integer" max="32767" units="dev"/>
+        </inkml:traceFormat>
+        <inkml:channelProperties>
+          <inkml:channelProperty channel="X" name="resolution" value="1000" units="1/cm"/>
+          <inkml:channelProperty channel="Y" name="resolution" value="1000" units="1/cm"/>
+          <inkml:channelProperty channel="F" name="resolution" value="0" units="1/dev"/>
+        </inkml:channelProperties>
+      </inkml:inkSource>
+      <inkml:timestamp xml:id="ts0" timeString="2026-04-04T14:19:00.426"/>
+    </inkml:context>
+    <inkml:brush xml:id="br0">
+      <inkml:brushProperty name="width" value="0.05" units="cm"/>
+      <inkml:brushProperty name="height" value="0.05" units="cm"/>
+    </inkml:brush>
+  </inkml:definitions>
+  <inkml:trace contextRef="#ctx0" brushRef="#br0">720 1 24575,'-37'2'0,"1"2"0,-1 2 0,1 1 0,-48 16 0,60-13 0,1 0 0,1 2 0,-36 23 0,34-20 0,8-4 0,1 1 0,0 0 0,-25 28 0,27-25 0,-1-1 0,0-1 0,-27 19 0,35-28 0,0 1 0,0 0 0,0 0 0,1 0 0,-1 1 0,1 0 0,1 0 0,-1 0 0,-3 8 0,-30 68 0,8-15 0,22-48 0,0 1 0,1 0 0,1 0 0,1 1 0,1 0 0,1 0 0,1 0 0,0 25 0,1-13 0,4 140 0,0-156 0,2 0 0,1-1 0,0 0 0,0 0 0,2 0 0,0-1 0,11 16 0,-1-7 0,0 0 0,24 23 0,-7-8 0,108 110 0,-119-126 0,53 38 0,-8-7 0,-42-34 0,-21-17 0,0 1 0,0 0 0,-1 1 0,0-1 0,1 1 0,-2 0 0,9 10 0,-13-14 0,0 0 0,0 0 0,0 1 0,0-1 0,0 0 0,0 0 0,0 1 0,-1-1 0,1 0 0,0 0 0,-1 0 0,1 0 0,-1 1 0,1-1 0,-1 0 0,1 0 0,-1 0 0,0 0 0,0 0 0,1 0 0,-1 0 0,0-1 0,-2 2 0,-22 18 0,-171 70 0,196-89 0,-1-1 0,1 1 0,-1-1 0,1 1 0,-1-1 0,1 0 0,-1 1 0,1-1 0,-1 0 0,1 1 0,-1-1 0,0 0 0,1 0 0,-1 0 0,1 0 0,-1 1 0,0-1 0,1 0 0,-1 0 0,0 0 0,1 0 0,-1 0 0,1 0 0,-1-1 0,0 1 0,1 0 0,-1 0 0,1 0 0,-1-1 0,0 1 0,1 0 0,-1 0 0,0-1 0,5-20 0,22-24 0,7 4 0,2 3 0,1 0 0,2 3 0,43-32 0,-67 55 0,-1-1 0,0-1 0,-1 0 0,19-28 0,14-16 0,-45 57 0,1 1 0,-1-1 0,1 0 0,-1 1 0,1-1 0,-1 0 0,1 1 0,0-1 0,-1 0 0,1 1 0,0-1 0,-1 1 0,1-1 0,0 1 0,0 0 0,0-1 0,0 1 0,-1 0 0,1-1 0,0 1 0,0 0 0,0 0 0,0 0 0,0 0 0,0 0 0,-1 0 0,1 0 0,0 0 0,0 0 0,0 0 0,0 1 0,0-1 0,0 0 0,-1 0 0,1 1 0,0-1 0,0 1 0,-1-1 0,1 1 0,0-1 0,0 1 0,-1-1 0,1 1 0,0 0 0,-1-1 0,1 1 0,-1 0 0,1 0 0,-1-1 0,1 1 0,-1 0 0,0 0 0,1 0 0,-1-1 0,0 1 0,0 0 0,0 0 0,1 1 0,12 57 0,-12-54 0,6 28 0,1 1 0,17 41 0,-11-36 0,19 86 0,-14-45 0,-10-52 0,-6-20 0,0 1 0,0 0 0,-1 1 0,0-1 0,0 11 0,-2-19 0,-1-1 0,1 1 0,-1 0 0,0-1 0,0 1 0,1-1 0,-1 1 0,0 0 0,0-1 0,1 0 0,-1 1 0,0-1 0,0 1 0,0-1 0,0 0 0,0 0 0,0 0 0,0 1 0,0-1 0,0 0 0,1 0 0,-1 0 0,0 0 0,0-1 0,0 1 0,0 0 0,0 0 0,0 0 0,0-1 0,0 1 0,-1-1 0,-42-10 0,37 9 0,-13-3 0,-5-2 0,-1 0 0,0 2 0,0 1 0,-34 0 0,37 3 37,-1-2 0,-27-5-1,-7-2-1511,38 8-5351</inkml:trace>
+</inkml:ink>
+</file>
+
+<file path=ppt/ink/ink12.xml><?xml version="1.0" encoding="utf-8"?>
+<inkml:ink xmlns:inkml="http://www.w3.org/2003/InkML">
+  <inkml:definitions>
+    <inkml:context xml:id="ctx0">
+      <inkml:inkSource xml:id="inkSrc0">
+        <inkml:traceFormat>
+          <inkml:channel name="X" type="integer" min="-2.14748E9" max="2.14748E9" units="cm"/>
+          <inkml:channel name="Y" type="integer" min="-2.14748E9" max="2.14748E9" units="cm"/>
+          <inkml:channel name="F" type="integer" max="32767" units="dev"/>
+        </inkml:traceFormat>
+        <inkml:channelProperties>
+          <inkml:channelProperty channel="X" name="resolution" value="1000" units="1/cm"/>
+          <inkml:channelProperty channel="Y" name="resolution" value="1000" units="1/cm"/>
+          <inkml:channelProperty channel="F" name="resolution" value="0" units="1/dev"/>
+        </inkml:channelProperties>
+      </inkml:inkSource>
       <inkml:timestamp xml:id="ts0" timeString="2026-04-04T05:44:23.625"/>
     </inkml:context>
     <inkml:brush xml:id="br0">
@@ -528,7 +609,250 @@
 </inkml:ink>
 </file>
 
-<file path=ppt/ink/ink10.xml><?xml version="1.0" encoding="utf-8"?>
+<file path=ppt/ink/ink13.xml><?xml version="1.0" encoding="utf-8"?>
+<inkml:ink xmlns:inkml="http://www.w3.org/2003/InkML">
+  <inkml:definitions>
+    <inkml:context xml:id="ctx0">
+      <inkml:inkSource xml:id="inkSrc0">
+        <inkml:traceFormat>
+          <inkml:channel name="X" type="integer" min="-2.14748E9" max="2.14748E9" units="cm"/>
+          <inkml:channel name="Y" type="integer" min="-2.14748E9" max="2.14748E9" units="cm"/>
+          <inkml:channel name="F" type="integer" max="32767" units="dev"/>
+        </inkml:traceFormat>
+        <inkml:channelProperties>
+          <inkml:channelProperty channel="X" name="resolution" value="1000" units="1/cm"/>
+          <inkml:channelProperty channel="Y" name="resolution" value="1000" units="1/cm"/>
+          <inkml:channelProperty channel="F" name="resolution" value="0" units="1/dev"/>
+        </inkml:channelProperties>
+      </inkml:inkSource>
+      <inkml:timestamp xml:id="ts0" timeString="2026-04-04T05:44:24.258"/>
+    </inkml:context>
+    <inkml:brush xml:id="br0">
+      <inkml:brushProperty name="width" value="0.05" units="cm"/>
+      <inkml:brushProperty name="height" value="0.05" units="cm"/>
+    </inkml:brush>
+  </inkml:definitions>
+  <inkml:trace contextRef="#ctx0" brushRef="#br0">1 0 24575,'0'0'-8191</inkml:trace>
+</inkml:ink>
+</file>
+
+<file path=ppt/ink/ink14.xml><?xml version="1.0" encoding="utf-8"?>
+<inkml:ink xmlns:inkml="http://www.w3.org/2003/InkML">
+  <inkml:definitions>
+    <inkml:context xml:id="ctx0">
+      <inkml:inkSource xml:id="inkSrc0">
+        <inkml:traceFormat>
+          <inkml:channel name="X" type="integer" min="-2.14748E9" max="2.14748E9" units="cm"/>
+          <inkml:channel name="Y" type="integer" min="-2.14748E9" max="2.14748E9" units="cm"/>
+          <inkml:channel name="F" type="integer" max="32767" units="dev"/>
+        </inkml:traceFormat>
+        <inkml:channelProperties>
+          <inkml:channelProperty channel="X" name="resolution" value="1000" units="1/cm"/>
+          <inkml:channelProperty channel="Y" name="resolution" value="1000" units="1/cm"/>
+          <inkml:channelProperty channel="F" name="resolution" value="0" units="1/dev"/>
+        </inkml:channelProperties>
+      </inkml:inkSource>
+      <inkml:timestamp xml:id="ts0" timeString="2026-04-04T05:44:24.756"/>
+    </inkml:context>
+    <inkml:brush xml:id="br0">
+      <inkml:brushProperty name="width" value="0.05" units="cm"/>
+      <inkml:brushProperty name="height" value="0.05" units="cm"/>
+    </inkml:brush>
+  </inkml:definitions>
+  <inkml:trace contextRef="#ctx0" brushRef="#br0">0 1 24575,'0'0'-8191</inkml:trace>
+</inkml:ink>
+</file>
+
+<file path=ppt/ink/ink15.xml><?xml version="1.0" encoding="utf-8"?>
+<inkml:ink xmlns:inkml="http://www.w3.org/2003/InkML">
+  <inkml:definitions>
+    <inkml:context xml:id="ctx0">
+      <inkml:inkSource xml:id="inkSrc0">
+        <inkml:traceFormat>
+          <inkml:channel name="X" type="integer" min="-2.14748E9" max="2.14748E9" units="cm"/>
+          <inkml:channel name="Y" type="integer" min="-2.14748E9" max="2.14748E9" units="cm"/>
+          <inkml:channel name="F" type="integer" max="32767" units="dev"/>
+        </inkml:traceFormat>
+        <inkml:channelProperties>
+          <inkml:channelProperty channel="X" name="resolution" value="1000" units="1/cm"/>
+          <inkml:channelProperty channel="Y" name="resolution" value="1000" units="1/cm"/>
+          <inkml:channelProperty channel="F" name="resolution" value="0" units="1/dev"/>
+        </inkml:channelProperties>
+      </inkml:inkSource>
+      <inkml:timestamp xml:id="ts0" timeString="2026-04-04T05:44:26.719"/>
+    </inkml:context>
+    <inkml:brush xml:id="br0">
+      <inkml:brushProperty name="width" value="0.05" units="cm"/>
+      <inkml:brushProperty name="height" value="0.05" units="cm"/>
+    </inkml:brush>
+  </inkml:definitions>
+  <inkml:trace contextRef="#ctx0" brushRef="#br0">1 124 24575,'-1'6'0,"1"-1"0,1 1 0,-1-1 0,1 1 0,0-1 0,0 1 0,0-1 0,1 0 0,0 1 0,0-1 0,5 9 0,-4-11 0,-1-1 0,1 1 0,-1 0 0,1-1 0,0 0 0,0 1 0,0-1 0,0-1 0,0 1 0,1 0 0,-1-1 0,1 1 0,-1-1 0,1 0 0,-1 0 0,1 0 0,0-1 0,6 1 0,48 8 0,-50-7 0,1 0 0,-1 0 0,0-1 0,1 0 0,-1 0 0,1-1 0,0 0 0,-1 0 0,1-1 0,-1-1 0,0 1 0,1-1 0,-1 0 0,0-1 0,0 0 0,9-5 0,-11 4 8,0 0 0,0 0 0,0 0 0,-1-1 0,0 0 0,0 0 0,0 0 0,0-1 0,-1 0 0,0 0 0,0 0 0,-1 0 0,1 0 0,3-12 0,-3 4-220,-1-1 0,0 1 0,-1 0-1,0-1 1,-2 0 0,0-16 0,0 13-6614</inkml:trace>
+</inkml:ink>
+</file>
+
+<file path=ppt/ink/ink16.xml><?xml version="1.0" encoding="utf-8"?>
+<inkml:ink xmlns:inkml="http://www.w3.org/2003/InkML">
+  <inkml:definitions>
+    <inkml:context xml:id="ctx0">
+      <inkml:inkSource xml:id="inkSrc0">
+        <inkml:traceFormat>
+          <inkml:channel name="X" type="integer" min="-2.14748E9" max="2.14748E9" units="cm"/>
+          <inkml:channel name="Y" type="integer" min="-2.14748E9" max="2.14748E9" units="cm"/>
+          <inkml:channel name="F" type="integer" max="32767" units="dev"/>
+        </inkml:traceFormat>
+        <inkml:channelProperties>
+          <inkml:channelProperty channel="X" name="resolution" value="1000" units="1/cm"/>
+          <inkml:channelProperty channel="Y" name="resolution" value="1000" units="1/cm"/>
+          <inkml:channelProperty channel="F" name="resolution" value="0" units="1/dev"/>
+        </inkml:channelProperties>
+      </inkml:inkSource>
+      <inkml:timestamp xml:id="ts0" timeString="2026-04-04T05:44:29.753"/>
+    </inkml:context>
+    <inkml:brush xml:id="br0">
+      <inkml:brushProperty name="width" value="0.05" units="cm"/>
+      <inkml:brushProperty name="height" value="0.05" units="cm"/>
+    </inkml:brush>
+  </inkml:definitions>
+  <inkml:trace contextRef="#ctx0" brushRef="#br0">999 1674 24575,'-76'11'0,"4"-1"0,43-9 0,-176-3 0,189 1 0,1-2 0,-1 0 0,1-1 0,0-1 0,0 0 0,0-1 0,-23-12 0,-143-73 0,165 83 0,1-1 0,0-1 0,0-1 0,1 0 0,0 0 0,1-1 0,0-1 0,1-1 0,0 1 0,1-2 0,1 0 0,-13-23 0,1 1 0,16 30 0,2 0 0,-1 0 0,1-1 0,0 1 0,0-1 0,1 0 0,0 0 0,1 0 0,-3-14 0,-14-96 0,10 75 0,2-1 0,-1-69 0,7 51 0,0 27 0,1 1 0,2 0 0,11-64 0,-7 69 0,-5 23 0,0-1 0,1 0 0,-1 1 0,1 0 0,1-1 0,-1 1 0,1 0 0,7-11 0,-3 5 0,0-1 0,-1 1 0,0-1 0,4-16 0,-5 13 0,1 1 0,15-27 0,-3 16 0,1 1 0,1 1 0,1 0 0,1 2 0,37-29 0,48-32 0,-23 41 0,-16 15 0,-21 12 0,6-6 0,78-20 0,-107 35 0,1 1 0,0 1 0,0 1 0,0 2 0,43 2 0,-40 3 0,1 0 0,-1 2 0,43 16 0,-63-18 0,0 0 0,0 1 0,-1 0 0,0 0 0,0 1 0,10 11 0,28 20 0,-38-32 0,0 0 0,0 0 0,0 0 0,0 1 0,-1 0 0,0 0 0,0 1 0,8 12 0,-4-1 0,-1-1 0,10 30 0,-12-29 0,15 24 0,-17-34 0,-1 0 0,1 1 0,-1-1 0,4 16 0,19 60 0,-19-64 0,-1 2 0,-1-1 0,0 1 0,4 42 0,12 83 0,-13-90 0,-4-29 0,2 57 0,-9-47 0,-1 1 0,-9 38 0,9-59 0,0 0 0,-1 0 0,0-1 0,-2 1 0,0-1 0,-1 0 0,-1-1 0,0 0 0,-1 0 0,-1 0 0,-21 24 0,25-32 0,-1 1 0,1 0 0,1 0 0,-6 12 0,6-11 0,-1 0 0,0 0 0,-13 16 0,-65 79 0,66-81-1365,13-11-5461</inkml:trace>
+</inkml:ink>
+</file>
+
+<file path=ppt/ink/ink17.xml><?xml version="1.0" encoding="utf-8"?>
+<inkml:ink xmlns:inkml="http://www.w3.org/2003/InkML">
+  <inkml:definitions>
+    <inkml:context xml:id="ctx0">
+      <inkml:inkSource xml:id="inkSrc0">
+        <inkml:traceFormat>
+          <inkml:channel name="X" type="integer" min="-2.14748E9" max="2.14748E9" units="cm"/>
+          <inkml:channel name="Y" type="integer" min="-2.14748E9" max="2.14748E9" units="cm"/>
+          <inkml:channel name="F" type="integer" max="32767" units="dev"/>
+        </inkml:traceFormat>
+        <inkml:channelProperties>
+          <inkml:channelProperty channel="X" name="resolution" value="1000" units="1/cm"/>
+          <inkml:channelProperty channel="Y" name="resolution" value="1000" units="1/cm"/>
+          <inkml:channelProperty channel="F" name="resolution" value="0" units="1/dev"/>
+        </inkml:channelProperties>
+      </inkml:inkSource>
+      <inkml:timestamp xml:id="ts0" timeString="2026-04-04T05:44:30.465"/>
+    </inkml:context>
+    <inkml:brush xml:id="br0">
+      <inkml:brushProperty name="width" value="0.05" units="cm"/>
+      <inkml:brushProperty name="height" value="0.05" units="cm"/>
+    </inkml:brush>
+  </inkml:definitions>
+  <inkml:trace contextRef="#ctx0" brushRef="#br0">1 1 24575,'0'0'-8191</inkml:trace>
+</inkml:ink>
+</file>
+
+<file path=ppt/ink/ink18.xml><?xml version="1.0" encoding="utf-8"?>
+<inkml:ink xmlns:inkml="http://www.w3.org/2003/InkML">
+  <inkml:definitions>
+    <inkml:context xml:id="ctx0">
+      <inkml:inkSource xml:id="inkSrc0">
+        <inkml:traceFormat>
+          <inkml:channel name="X" type="integer" min="-2.14748E9" max="2.14748E9" units="cm"/>
+          <inkml:channel name="Y" type="integer" min="-2.14748E9" max="2.14748E9" units="cm"/>
+          <inkml:channel name="F" type="integer" max="32767" units="dev"/>
+        </inkml:traceFormat>
+        <inkml:channelProperties>
+          <inkml:channelProperty channel="X" name="resolution" value="1000" units="1/cm"/>
+          <inkml:channelProperty channel="Y" name="resolution" value="1000" units="1/cm"/>
+          <inkml:channelProperty channel="F" name="resolution" value="0" units="1/dev"/>
+        </inkml:channelProperties>
+      </inkml:inkSource>
+      <inkml:timestamp xml:id="ts0" timeString="2026-04-04T05:44:31.023"/>
+    </inkml:context>
+    <inkml:brush xml:id="br0">
+      <inkml:brushProperty name="width" value="0.05" units="cm"/>
+      <inkml:brushProperty name="height" value="0.05" units="cm"/>
+    </inkml:brush>
+  </inkml:definitions>
+  <inkml:trace contextRef="#ctx0" brushRef="#br0">1 0 24575,'0'0'-8191</inkml:trace>
+</inkml:ink>
+</file>
+
+<file path=ppt/ink/ink19.xml><?xml version="1.0" encoding="utf-8"?>
+<inkml:ink xmlns:inkml="http://www.w3.org/2003/InkML">
+  <inkml:definitions>
+    <inkml:context xml:id="ctx0">
+      <inkml:inkSource xml:id="inkSrc0">
+        <inkml:traceFormat>
+          <inkml:channel name="X" type="integer" min="-2.14748E9" max="2.14748E9" units="cm"/>
+          <inkml:channel name="Y" type="integer" min="-2.14748E9" max="2.14748E9" units="cm"/>
+          <inkml:channel name="F" type="integer" max="32767" units="dev"/>
+        </inkml:traceFormat>
+        <inkml:channelProperties>
+          <inkml:channelProperty channel="X" name="resolution" value="1000" units="1/cm"/>
+          <inkml:channelProperty channel="Y" name="resolution" value="1000" units="1/cm"/>
+          <inkml:channelProperty channel="F" name="resolution" value="0" units="1/dev"/>
+        </inkml:channelProperties>
+      </inkml:inkSource>
+      <inkml:timestamp xml:id="ts0" timeString="2026-04-04T05:44:32.362"/>
+    </inkml:context>
+    <inkml:brush xml:id="br0">
+      <inkml:brushProperty name="width" value="0.05" units="cm"/>
+      <inkml:brushProperty name="height" value="0.05" units="cm"/>
+    </inkml:brush>
+  </inkml:definitions>
+  <inkml:trace contextRef="#ctx0" brushRef="#br0">1 227 24575,'46'-17'0,"-34"11"0,21-9 0,-2-2 0,55-38 0,-18 19 0,-10 8 0,23-18-1365,-69 40-5461</inkml:trace>
+</inkml:ink>
+</file>
+
+<file path=ppt/ink/ink2.xml><?xml version="1.0" encoding="utf-8"?>
+<inkml:ink xmlns:inkml="http://www.w3.org/2003/InkML">
+  <inkml:definitions>
+    <inkml:context xml:id="ctx0">
+      <inkml:inkSource xml:id="inkSrc0">
+        <inkml:traceFormat>
+          <inkml:channel name="X" type="integer" min="-2.14748E9" max="2.14748E9" units="cm"/>
+          <inkml:channel name="Y" type="integer" min="-2.14748E9" max="2.14748E9" units="cm"/>
+          <inkml:channel name="F" type="integer" max="32767" units="dev"/>
+        </inkml:traceFormat>
+        <inkml:channelProperties>
+          <inkml:channelProperty channel="X" name="resolution" value="1000" units="1/cm"/>
+          <inkml:channelProperty channel="Y" name="resolution" value="1000" units="1/cm"/>
+          <inkml:channelProperty channel="F" name="resolution" value="0" units="1/dev"/>
+        </inkml:channelProperties>
+      </inkml:inkSource>
+      <inkml:timestamp xml:id="ts0" timeString="2026-04-04T14:18:35.725"/>
+    </inkml:context>
+    <inkml:brush xml:id="br0">
+      <inkml:brushProperty name="width" value="0.05" units="cm"/>
+      <inkml:brushProperty name="height" value="0.05" units="cm"/>
+    </inkml:brush>
+  </inkml:definitions>
+  <inkml:trace contextRef="#ctx0" brushRef="#br0">0 86 24575,'1'-2'0,"-1"1"0,1 0 0,-1 0 0,1 0 0,0 0 0,0 0 0,-1 0 0,1 0 0,0 0 0,0 0 0,0 0 0,0 1 0,0-1 0,0 0 0,0 1 0,0-1 0,0 0 0,1 1 0,-1-1 0,2 0 0,30-10 0,-29 10 0,107-34 0,-29 16-1365</inkml:trace>
+</inkml:ink>
+</file>
+
+<file path=ppt/ink/ink20.xml><?xml version="1.0" encoding="utf-8"?>
+<inkml:ink xmlns:inkml="http://www.w3.org/2003/InkML">
+  <inkml:definitions>
+    <inkml:context xml:id="ctx0">
+      <inkml:inkSource xml:id="inkSrc0">
+        <inkml:traceFormat>
+          <inkml:channel name="X" type="integer" min="-2.14748E9" max="2.14748E9" units="cm"/>
+          <inkml:channel name="Y" type="integer" min="-2.14748E9" max="2.14748E9" units="cm"/>
+          <inkml:channel name="F" type="integer" max="32767" units="dev"/>
+        </inkml:traceFormat>
+        <inkml:channelProperties>
+          <inkml:channelProperty channel="X" name="resolution" value="1000" units="1/cm"/>
+          <inkml:channelProperty channel="Y" name="resolution" value="1000" units="1/cm"/>
+          <inkml:channelProperty channel="F" name="resolution" value="0" units="1/dev"/>
+        </inkml:channelProperties>
+      </inkml:inkSource>
+      <inkml:timestamp xml:id="ts0" timeString="2026-04-04T05:44:44.411"/>
+    </inkml:context>
+    <inkml:brush xml:id="br0">
+      <inkml:brushProperty name="width" value="0.05" units="cm"/>
+      <inkml:brushProperty name="height" value="0.05" units="cm"/>
+    </inkml:brush>
+  </inkml:definitions>
+  <inkml:trace contextRef="#ctx0" brushRef="#br0">142 0 24575,'-19'63'0,"17"-56"0,-1 1 0,0-1 0,0 0 0,-1 1 0,0-2 0,0 1 0,0 0 0,-1-1 0,0 0 0,0 0 0,-11 9 0,-15 19 0,7 12-171,19-33-1023,0 0-5632</inkml:trace>
+</inkml:ink>
+</file>
+
+<file path=ppt/ink/ink21.xml><?xml version="1.0" encoding="utf-8"?>
 <inkml:ink xmlns:inkml="http://www.w3.org/2003/InkML">
   <inkml:definitions>
     <inkml:context xml:id="ctx0">
@@ -555,7 +879,7 @@
 </inkml:ink>
 </file>
 
-<file path=ppt/ink/ink11.xml><?xml version="1.0" encoding="utf-8"?>
+<file path=ppt/ink/ink22.xml><?xml version="1.0" encoding="utf-8"?>
 <inkml:ink xmlns:inkml="http://www.w3.org/2003/InkML">
   <inkml:definitions>
     <inkml:context xml:id="ctx0">
@@ -582,7 +906,7 @@
 </inkml:ink>
 </file>
 
-<file path=ppt/ink/ink12.xml><?xml version="1.0" encoding="utf-8"?>
+<file path=ppt/ink/ink23.xml><?xml version="1.0" encoding="utf-8"?>
 <inkml:ink xmlns:inkml="http://www.w3.org/2003/InkML">
   <inkml:definitions>
     <inkml:context xml:id="ctx0">
@@ -609,7 +933,7 @@
 </inkml:ink>
 </file>
 
-<file path=ppt/ink/ink13.xml><?xml version="1.0" encoding="utf-8"?>
+<file path=ppt/ink/ink24.xml><?xml version="1.0" encoding="utf-8"?>
 <inkml:ink xmlns:inkml="http://www.w3.org/2003/InkML">
   <inkml:definitions>
     <inkml:context xml:id="ctx0">
@@ -636,7 +960,7 @@
 </inkml:ink>
 </file>
 
-<file path=ppt/ink/ink14.xml><?xml version="1.0" encoding="utf-8"?>
+<file path=ppt/ink/ink25.xml><?xml version="1.0" encoding="utf-8"?>
 <inkml:ink xmlns:inkml="http://www.w3.org/2003/InkML">
   <inkml:definitions>
     <inkml:context xml:id="ctx0">
@@ -663,33 +987,6 @@
 </inkml:ink>
 </file>
 
-<file path=ppt/ink/ink2.xml><?xml version="1.0" encoding="utf-8"?>
-<inkml:ink xmlns:inkml="http://www.w3.org/2003/InkML">
-  <inkml:definitions>
-    <inkml:context xml:id="ctx0">
-      <inkml:inkSource xml:id="inkSrc0">
-        <inkml:traceFormat>
-          <inkml:channel name="X" type="integer" min="-2.14748E9" max="2.14748E9" units="cm"/>
-          <inkml:channel name="Y" type="integer" min="-2.14748E9" max="2.14748E9" units="cm"/>
-          <inkml:channel name="F" type="integer" max="32767" units="dev"/>
-        </inkml:traceFormat>
-        <inkml:channelProperties>
-          <inkml:channelProperty channel="X" name="resolution" value="1000" units="1/cm"/>
-          <inkml:channelProperty channel="Y" name="resolution" value="1000" units="1/cm"/>
-          <inkml:channelProperty channel="F" name="resolution" value="0" units="1/dev"/>
-        </inkml:channelProperties>
-      </inkml:inkSource>
-      <inkml:timestamp xml:id="ts0" timeString="2026-04-04T05:44:24.258"/>
-    </inkml:context>
-    <inkml:brush xml:id="br0">
-      <inkml:brushProperty name="width" value="0.05" units="cm"/>
-      <inkml:brushProperty name="height" value="0.05" units="cm"/>
-    </inkml:brush>
-  </inkml:definitions>
-  <inkml:trace contextRef="#ctx0" brushRef="#br0">1 0 24575,'0'0'-8191</inkml:trace>
-</inkml:ink>
-</file>
-
 <file path=ppt/ink/ink3.xml><?xml version="1.0" encoding="utf-8"?>
 <inkml:ink xmlns:inkml="http://www.w3.org/2003/InkML">
   <inkml:definitions>
@@ -706,14 +1003,14 @@
           <inkml:channelProperty channel="F" name="resolution" value="0" units="1/dev"/>
         </inkml:channelProperties>
       </inkml:inkSource>
-      <inkml:timestamp xml:id="ts0" timeString="2026-04-04T05:44:24.756"/>
+      <inkml:timestamp xml:id="ts0" timeString="2026-04-04T14:18:28.987"/>
     </inkml:context>
     <inkml:brush xml:id="br0">
       <inkml:brushProperty name="width" value="0.05" units="cm"/>
       <inkml:brushProperty name="height" value="0.05" units="cm"/>
     </inkml:brush>
   </inkml:definitions>
-  <inkml:trace contextRef="#ctx0" brushRef="#br0">0 1 24575,'0'0'-8191</inkml:trace>
+  <inkml:trace contextRef="#ctx0" brushRef="#br0">0 0 24575,'3'7'0,"-1"0"0,1 0 0,1 0 0,0 0 0,0-1 0,0 0 0,1 0 0,8 10 0,-6-8 0,11 12 0,1 0 0,2-2 0,-1 0 0,2-2 0,0 0 0,32 16 0,116 53 0,52 12 0,-107-54 0,19 13 0,87 18 0,-54-22 0,-104-40 0,-37-7 0,0 0 0,34 12 0,-41-10 0,0-2 0,0-1 0,28 3 0,31 8 0,-60-10 0,4 2 0,-1-2 0,2 0 0,-1-1 0,43 2 0,-39-5 0,0 2 0,40 9 0,-16-3 0,91 1 0,-102-1 0,-33-7 0,1 0 0,-1-1 0,1 1 0,0-1 0,9 0 0,167 12 0,-4 0 0,-14-4 0,-31-1 0,42 10 0,17-9 0,-59 0 0,0-1 0,122 0 0,67-4 0,-168-7 0,-11 6 0,150-6 0,33-6 0,-311 9 0,90-9 0,137-17 0,-124 17 0,-37-4 0,-59 8 0,0 2 0,43-2 0,-50 4 0,-1-1 0,0 0 0,27-7 0,28-4 0,98-5 0,-27-8 0,-110 20 0,1-1 0,-1-1 0,-1-1 0,0-2 0,29-15 0,-57 25 0,31-15 0,0-2 0,-2-2 0,51-40 0,-28 20 0,81-69 0,-87 68 0,42-57 0,-38 37 0,-16 17 0,18-34 0,-37 51-1365</inkml:trace>
 </inkml:ink>
 </file>
 
@@ -733,14 +1030,14 @@
           <inkml:channelProperty channel="F" name="resolution" value="0" units="1/dev"/>
         </inkml:channelProperties>
       </inkml:inkSource>
-      <inkml:timestamp xml:id="ts0" timeString="2026-04-04T05:44:26.719"/>
+      <inkml:timestamp xml:id="ts0" timeString="2026-04-04T14:18:41.088"/>
     </inkml:context>
     <inkml:brush xml:id="br0">
       <inkml:brushProperty name="width" value="0.05" units="cm"/>
       <inkml:brushProperty name="height" value="0.05" units="cm"/>
     </inkml:brush>
   </inkml:definitions>
-  <inkml:trace contextRef="#ctx0" brushRef="#br0">1 124 24575,'-1'6'0,"1"-1"0,1 1 0,-1-1 0,1 1 0,0-1 0,0 1 0,0-1 0,1 0 0,0 1 0,0-1 0,5 9 0,-4-11 0,-1-1 0,1 1 0,-1 0 0,1-1 0,0 0 0,0 1 0,0-1 0,0-1 0,0 1 0,1 0 0,-1-1 0,1 1 0,-1-1 0,1 0 0,-1 0 0,1 0 0,0-1 0,6 1 0,48 8 0,-50-7 0,1 0 0,-1 0 0,0-1 0,1 0 0,-1 0 0,1-1 0,0 0 0,-1 0 0,1-1 0,-1-1 0,0 1 0,1-1 0,-1 0 0,0-1 0,0 0 0,9-5 0,-11 4 8,0 0 0,0 0 0,0 0 0,-1-1 0,0 0 0,0 0 0,0 0 0,0-1 0,-1 0 0,0 0 0,0 0 0,-1 0 0,1 0 0,3-12 0,-3 4-220,-1-1 0,0 1 0,-1 0-1,0-1 1,-2 0 0,0-16 0,0 13-6614</inkml:trace>
+  <inkml:trace contextRef="#ctx0" brushRef="#br0">903 1 24575,'-5'1'0,"0"-1"0,0 2 0,0-1 0,1 0 0,-1 1 0,0 0 0,1 0 0,-1 0 0,1 1 0,0-1 0,0 1 0,-6 6 0,-47 45 0,47-44 0,-130 155 0,123-143 0,-28 38 0,-49 84 0,42-58 0,31-48 0,4-10 0,1 1 0,2 1 0,1 0 0,-14 51 0,-44 199 0,53-201 0,13-54 0,-1 0 0,-12 34 0,13-44 0,1 0 0,1 0 0,0 0 0,0 16 0,-6 25 0,-39 229 0,35-234 0,10-42 0,0 0 0,1-1 0,0 1 0,0 0 0,0 14 0,-11 137 0,7-112 0,-1 36 0,6-66 0,0-1 0,-2 1 0,-5 21 0,4-22 0,0 1 0,2 0 0,-1 22 0,3-11 0,-1-1 0,-1 0 0,-1 1 0,-10 37 0,8-35 0,1-1 0,2 1 0,0-1 0,6 52 0,-2-3 0,-15 80 0,10 249 0,5-207 0,-2 514 0,2-688 0,0-1 0,8 31 0,-5-30 0,-1-1 0,1 35 0,8 57 0,0 2 0,-12-96 0,2-1 0,6 34 0,-4-34 0,-1 1 0,0 36 0,-2-39 0,0-1 0,1 1 0,10 37 0,-7-38 0,-1 1 0,-2 0 0,3 35 0,-4-37 0,0-1 0,1 0 0,1 0 0,8 23 0,4 18 0,46 184 0,-53-185 0,-8-46 0,0-1 0,1 1 0,0-1 0,7 20 0,57 138 0,-47-110 0,-17-47 0,2 0 0,-1-1 0,2 1 0,-1-1 0,1-1 0,10 15 0,-11-16 0,1 0 0,-2 0 0,1 0 0,-1 0 0,0 0 0,1 12 0,6 17 0,33 88 0,-35-103 0,1 0 0,2 0 0,22 36 0,56 93 0,-19-27 0,-6-29 0,-44-67 0,33 35 0,9 12 0,-48-58 0,0-2 0,22 19 0,-9-9 0,-4-10-1365</inkml:trace>
 </inkml:ink>
 </file>
 
@@ -760,14 +1057,14 @@
           <inkml:channelProperty channel="F" name="resolution" value="0" units="1/dev"/>
         </inkml:channelProperties>
       </inkml:inkSource>
-      <inkml:timestamp xml:id="ts0" timeString="2026-04-04T05:44:29.753"/>
+      <inkml:timestamp xml:id="ts0" timeString="2026-04-04T14:18:42.631"/>
     </inkml:context>
     <inkml:brush xml:id="br0">
       <inkml:brushProperty name="width" value="0.05" units="cm"/>
       <inkml:brushProperty name="height" value="0.05" units="cm"/>
     </inkml:brush>
   </inkml:definitions>
-  <inkml:trace contextRef="#ctx0" brushRef="#br0">999 1674 24575,'-76'11'0,"4"-1"0,43-9 0,-176-3 0,189 1 0,1-2 0,-1 0 0,1-1 0,0-1 0,0 0 0,0-1 0,-23-12 0,-143-73 0,165 83 0,1-1 0,0-1 0,0-1 0,1 0 0,0 0 0,1-1 0,0-1 0,1-1 0,0 1 0,1-2 0,1 0 0,-13-23 0,1 1 0,16 30 0,2 0 0,-1 0 0,1-1 0,0 1 0,0-1 0,1 0 0,0 0 0,1 0 0,-3-14 0,-14-96 0,10 75 0,2-1 0,-1-69 0,7 51 0,0 27 0,1 1 0,2 0 0,11-64 0,-7 69 0,-5 23 0,0-1 0,1 0 0,-1 1 0,1 0 0,1-1 0,-1 1 0,1 0 0,7-11 0,-3 5 0,0-1 0,-1 1 0,0-1 0,4-16 0,-5 13 0,1 1 0,15-27 0,-3 16 0,1 1 0,1 1 0,1 0 0,1 2 0,37-29 0,48-32 0,-23 41 0,-16 15 0,-21 12 0,6-6 0,78-20 0,-107 35 0,1 1 0,0 1 0,0 1 0,0 2 0,43 2 0,-40 3 0,1 0 0,-1 2 0,43 16 0,-63-18 0,0 0 0,0 1 0,-1 0 0,0 0 0,0 1 0,10 11 0,28 20 0,-38-32 0,0 0 0,0 0 0,0 0 0,0 1 0,-1 0 0,0 0 0,0 1 0,8 12 0,-4-1 0,-1-1 0,10 30 0,-12-29 0,15 24 0,-17-34 0,-1 0 0,1 1 0,-1-1 0,4 16 0,19 60 0,-19-64 0,-1 2 0,-1-1 0,0 1 0,4 42 0,12 83 0,-13-90 0,-4-29 0,2 57 0,-9-47 0,-1 1 0,-9 38 0,9-59 0,0 0 0,-1 0 0,0-1 0,-2 1 0,0-1 0,-1 0 0,-1-1 0,0 0 0,-1 0 0,-1 0 0,-21 24 0,25-32 0,-1 1 0,1 0 0,1 0 0,-6 12 0,6-11 0,-1 0 0,0 0 0,-13 16 0,-65 79 0,66-81-1365,13-11-5461</inkml:trace>
+  <inkml:trace contextRef="#ctx0" brushRef="#br0">66 0 24575,'-8'109'0,"2"-59"0,-7-1 0,10-42 0,1 0 0,0 1 0,0-1 0,0 0 0,0 14 0,-12 112 0,9-100 0,1 1 0,1 0 0,3 50 0,0-83 0,0 0 0,0-1 0,1 1 0,-1 0 0,0 0 0,0 0 0,0 0 0,1 0 0,-1-1 0,1 1 0,-1 0 0,0 0 0,1 0 0,-1-1 0,1 1 0,0 0 0,-1-1 0,1 1 0,-1 0 0,1-1 0,0 1 0,0-1 0,-1 1 0,1-1 0,0 1 0,0-1 0,0 0 0,-1 1 0,1-1 0,0 0 0,0 0 0,0 0 0,0 0 0,0 1 0,0-1 0,0 0 0,-1 0 0,1-1 0,0 1 0,0 0 0,0 0 0,0 0 0,0-1 0,0 1 0,1-1 0,50-23 0,-28 11 0,24-5 0,-17 6 0,0 1 0,43-9 0,64-14 0,-137 33 0,1 1 0,-1-1 0,1 1 0,0 0 0,-1 0 0,1-1 0,-1 1 0,1 0 0,-1 1 0,1-1 0,0 0 0,-1 0 0,1 1 0,-1-1 0,1 1 0,-1-1 0,1 1 0,-1-1 0,0 1 0,1 0 0,-1 0 0,0 0 0,1 0 0,-1 0 0,0 0 0,0 0 0,0 0 0,0 1 0,0-1 0,0 0 0,0 0 0,0 1 0,-1-1 0,1 1 0,0-1 0,-1 1 0,0-1 0,1 1 0,-1-1 0,0 1 0,1-1 0,-1 1 0,0 2 0,1 12 0,0 1 0,-1-1 0,-2 26 0,0-15 0,2 3 0,1-13 0,-1 0 0,-1 0 0,0 0 0,-5 17 0,5-29 0,-1 1 0,0-1 0,0 0 0,0 0 0,0 0 0,-1-1 0,0 1 0,0 0 0,0-1 0,-1 0 0,0 0 0,1 0 0,-1 0 0,-1-1 0,1 1 0,-8 4 0,3-2 0,-1-1 0,1 0 0,-1-1 0,0 1 0,0-2 0,0 1 0,0-2 0,-17 4 0,9-3-75,1 2 0,-1 0 0,1 1-1,-21 10 1,18-7-914,12-6-5837</inkml:trace>
 </inkml:ink>
 </file>
 
@@ -787,14 +1084,14 @@
           <inkml:channelProperty channel="F" name="resolution" value="0" units="1/dev"/>
         </inkml:channelProperties>
       </inkml:inkSource>
-      <inkml:timestamp xml:id="ts0" timeString="2026-04-04T05:44:30.465"/>
+      <inkml:timestamp xml:id="ts0" timeString="2026-04-04T14:18:43.328"/>
     </inkml:context>
     <inkml:brush xml:id="br0">
       <inkml:brushProperty name="width" value="0.05" units="cm"/>
       <inkml:brushProperty name="height" value="0.05" units="cm"/>
     </inkml:brush>
   </inkml:definitions>
-  <inkml:trace contextRef="#ctx0" brushRef="#br0">1 1 24575,'0'0'-8191</inkml:trace>
+  <inkml:trace contextRef="#ctx0" brushRef="#br0">0 117 24575,'41'-23'0,"-17"17"0,44-18 0,-16 5 0,59-23-1365,-102 39-5461</inkml:trace>
 </inkml:ink>
 </file>
 
@@ -814,14 +1111,14 @@
           <inkml:channelProperty channel="F" name="resolution" value="0" units="1/dev"/>
         </inkml:channelProperties>
       </inkml:inkSource>
-      <inkml:timestamp xml:id="ts0" timeString="2026-04-04T05:44:31.023"/>
+      <inkml:timestamp xml:id="ts0" timeString="2026-04-04T14:18:45.621"/>
     </inkml:context>
     <inkml:brush xml:id="br0">
       <inkml:brushProperty name="width" value="0.05" units="cm"/>
       <inkml:brushProperty name="height" value="0.05" units="cm"/>
     </inkml:brush>
   </inkml:definitions>
-  <inkml:trace contextRef="#ctx0" brushRef="#br0">1 0 24575,'0'0'-8191</inkml:trace>
+  <inkml:trace contextRef="#ctx0" brushRef="#br0">306 1 24575,'-8'0'0,"0"0"0,0 1 0,0 0 0,0 0 0,1 1 0,-1 0 0,1 0 0,-1 1 0,1 0 0,0 0 0,0 1 0,0 0 0,1 0 0,-1 1 0,1-1 0,0 1 0,0 1 0,0-1 0,-6 10 0,-6 6 0,11-14 0,1 0 0,0 0 0,0 1 0,0 0 0,-6 14 0,-40 65 0,44-69 0,2-4 0,0 0 0,0 1 0,2-1 0,0 1 0,0 0 0,1 1 0,1-1 0,0 23 0,2-31 0,-1 5 0,1-1 0,1 1 0,-1-1 0,2 1 0,0-1 0,0 0 0,1 1 0,0-1 0,1 0 0,6 11 0,6 6 0,0-2 0,2 0 0,1-1 0,1 0 0,1-2 0,29 25 0,-10-9-1365</inkml:trace>
 </inkml:ink>
 </file>
 
@@ -841,14 +1138,14 @@
           <inkml:channelProperty channel="F" name="resolution" value="0" units="1/dev"/>
         </inkml:channelProperties>
       </inkml:inkSource>
-      <inkml:timestamp xml:id="ts0" timeString="2026-04-04T05:44:32.362"/>
+      <inkml:timestamp xml:id="ts0" timeString="2026-04-04T14:18:47.021"/>
     </inkml:context>
     <inkml:brush xml:id="br0">
       <inkml:brushProperty name="width" value="0.05" units="cm"/>
       <inkml:brushProperty name="height" value="0.05" units="cm"/>
     </inkml:brush>
   </inkml:definitions>
-  <inkml:trace contextRef="#ctx0" brushRef="#br0">1 227 24575,'46'-17'0,"-34"11"0,21-9 0,-2-2 0,55-38 0,-18 19 0,-10 8 0,23-18-1365,-69 40-5461</inkml:trace>
+  <inkml:trace contextRef="#ctx0" brushRef="#br0">32 0 24575,'2'90'0,"-4"99"0,-4-142 0,-2 38 0,5-53 0,3-31 0,0 0 0,0 1 0,0-1 0,-1 1 0,1-1 0,-1 0 0,1 1 0,-1-1 0,1 0 0,-1 1 0,0-1 0,0 0 0,1 0 0,-1 0 0,0 1 0,0-1 0,0 0 0,-3 1 0,4-8 0,0 1 0,0-1 0,0 0 0,1 0 0,-1 1 0,1-1 0,3-7 0,16-42 0,41-79 0,-54 122 0,1 0 0,-1 1 0,2 0 0,11-12 0,-15 18 0,0 1 0,0-1 0,0 1 0,0-1 0,1 1 0,-1 1 0,1-1 0,0 1 0,0 0 0,10-3 0,-15 6 0,1 0 0,-1 0 0,0 0 0,1 0 0,-1 0 0,0 0 0,1 0 0,-1 1 0,0-1 0,1 0 0,-1 1 0,0-1 0,0 1 0,0 0 0,1-1 0,-1 1 0,0 0 0,0 0 0,0 0 0,0-1 0,0 1 0,0 0 0,0 0 0,-1 1 0,1-1 0,0 0 0,0 0 0,-1 0 0,1 0 0,-1 1 0,1-1 0,-1 0 0,0 1 0,1-1 0,-1 0 0,0 1 0,0-1 0,0 0 0,0 3 0,1 63 0,-2-53 0,-1 35 0,0-17 0,1-1 0,6 51 0,2-89 0,0 1 0,-1-1 0,1 0 0,-1 0 0,8-14 0,-3 2 0,0 0 0,1 1 0,1 0 0,1 1 0,24-24 0,-28 32 0,0 1 0,1 0 0,0 1 0,0 0 0,0 1 0,1 0 0,0 1 0,0 0 0,1 1 0,20-5 0,-32 9 0,0 0 0,0 0 0,-1 0 0,1 0 0,0 0 0,0 0 0,-1 0 0,1 0 0,0 0 0,0 0 0,0 0 0,-1 0 0,1 1 0,0-1 0,0 0 0,-1 1 0,1-1 0,0 0 0,-1 1 0,1-1 0,0 1 0,-1-1 0,1 1 0,-1-1 0,1 1 0,0 0 0,7 26 0,-9 45 0,-1-45 0,2 185-1365,0-201-5461</inkml:trace>
 </inkml:ink>
 </file>
 
@@ -868,14 +1165,14 @@
           <inkml:channelProperty channel="F" name="resolution" value="0" units="1/dev"/>
         </inkml:channelProperties>
       </inkml:inkSource>
-      <inkml:timestamp xml:id="ts0" timeString="2026-04-04T05:44:44.411"/>
+      <inkml:timestamp xml:id="ts0" timeString="2026-04-04T14:18:49.449"/>
     </inkml:context>
     <inkml:brush xml:id="br0">
       <inkml:brushProperty name="width" value="0.05" units="cm"/>
       <inkml:brushProperty name="height" value="0.05" units="cm"/>
     </inkml:brush>
   </inkml:definitions>
-  <inkml:trace contextRef="#ctx0" brushRef="#br0">142 0 24575,'-19'63'0,"17"-56"0,-1 1 0,0-1 0,0 0 0,-1 1 0,0-2 0,0 1 0,0 0 0,-1-1 0,0 0 0,0 0 0,-11 9 0,-15 19 0,7 12-171,19-33-1023,0 0-5632</inkml:trace>
+  <inkml:trace contextRef="#ctx0" brushRef="#br0">0 3 24575,'36'-1'0,"-21"0"0,0 1 0,0 0 0,0 1 0,17 4 0,-27-4 0,-1 0 0,1 1 0,-1-1 0,1 1 0,-1 0 0,0 1 0,0-1 0,0 1 0,0 0 0,-1-1 0,1 2 0,-1-1 0,1 0 0,-1 1 0,0-1 0,0 1 0,3 6 0,10 19 0,-1 1 0,-2 0 0,16 54 0,-19-5 0,-5-30 0,0-2 0,-3 0 0,-1 0 0,-6 50 0,3-90 0,0 1 0,0-1 0,0 0 0,-1 0 0,0 0 0,0 0 0,0-1 0,-1 1 0,0-1 0,-1 0 0,0 0 0,-9 9 0,3-3 0,0-2 0,-2 1 0,1-2 0,-1 0 0,-16 9 0,5-6-81,18-10-61,-1 1-1,1 1 0,0-1 1,0 1-1,0 0 0,0 0 0,0 1 1,-9 10-1</inkml:trace>
 </inkml:ink>
 </file>
 
@@ -5076,35 +5373,6 @@
       </p:sp>
       <p:sp>
         <p:nvSpPr>
-          <p:cNvPr id="4" name="내용 개체 틀 3">
-            <a:extLst>
-              <a:ext uri="{FF2B5EF4-FFF2-40B4-BE49-F238E27FC236}">
-                <a16:creationId xmlns:a16="http://schemas.microsoft.com/office/drawing/2014/main" id="{93B17FE4-E16E-CD29-9BCC-5AAD16BC0EFD}"/>
-              </a:ext>
-            </a:extLst>
-          </p:cNvPr>
-          <p:cNvSpPr>
-            <a:spLocks noGrp="1"/>
-          </p:cNvSpPr>
-          <p:nvPr>
-            <p:ph idx="1"/>
-          </p:nvPr>
-        </p:nvSpPr>
-        <p:spPr/>
-        <p:txBody>
-          <a:bodyPr vert="horz" lIns="91440" tIns="45720" rIns="91440" bIns="45720" rtlCol="0" anchor="t">
-            <a:normAutofit/>
-          </a:bodyPr>
-          <a:lstStyle/>
-          <a:p>
-            <a:endParaRPr lang="ko-KR" altLang="en-US" dirty="0">
-              <a:ea typeface="맑은 고딕"/>
-            </a:endParaRPr>
-          </a:p>
-        </p:txBody>
-      </p:sp>
-      <p:sp>
-        <p:nvSpPr>
           <p:cNvPr id="5" name="슬라이드 번호 개체 틀 4">
             <a:extLst>
               <a:ext uri="{FF2B5EF4-FFF2-40B4-BE49-F238E27FC236}">
@@ -8726,6 +8994,880 @@
           </a:graphicData>
         </a:graphic>
       </p:graphicFrame>
+      <p:grpSp>
+        <p:nvGrpSpPr>
+          <p:cNvPr id="22" name="그룹 21">
+            <a:extLst>
+              <a:ext uri="{FF2B5EF4-FFF2-40B4-BE49-F238E27FC236}">
+                <a16:creationId xmlns:a16="http://schemas.microsoft.com/office/drawing/2014/main" id="{54A2377B-88C2-9F4A-1AB6-BA26107E462A}"/>
+              </a:ext>
+            </a:extLst>
+          </p:cNvPr>
+          <p:cNvGrpSpPr/>
+          <p:nvPr/>
+        </p:nvGrpSpPr>
+        <p:grpSpPr>
+          <a:xfrm>
+            <a:off x="10187795" y="6149675"/>
+            <a:ext cx="119520" cy="166320"/>
+            <a:chOff x="10187795" y="6149675"/>
+            <a:chExt cx="119520" cy="166320"/>
+          </a:xfrm>
+        </p:grpSpPr>
+        <mc:AlternateContent xmlns:mc="http://schemas.openxmlformats.org/markup-compatibility/2006">
+          <mc:Choice xmlns:p14="http://schemas.microsoft.com/office/powerpoint/2010/main" Requires="p14">
+            <p:contentPart p14:bwMode="auto" r:id="rId2">
+              <p14:nvContentPartPr>
+                <p14:cNvPr id="20" name="잉크 19">
+                  <a:extLst>
+                    <a:ext uri="{FF2B5EF4-FFF2-40B4-BE49-F238E27FC236}">
+                      <a16:creationId xmlns:a16="http://schemas.microsoft.com/office/drawing/2014/main" id="{89228C1D-DF05-4BD8-AF9E-1D10C2CE14C3}"/>
+                    </a:ext>
+                  </a:extLst>
+                </p14:cNvPr>
+                <p14:cNvContentPartPr/>
+                <p14:nvPr/>
+              </p14:nvContentPartPr>
+              <p14:xfrm>
+                <a:off x="10187795" y="6149675"/>
+                <a:ext cx="119520" cy="166320"/>
+              </p14:xfrm>
+            </p:contentPart>
+          </mc:Choice>
+          <mc:Fallback>
+            <p:pic>
+              <p:nvPicPr>
+                <p:cNvPr id="20" name="잉크 19">
+                  <a:extLst>
+                    <a:ext uri="{FF2B5EF4-FFF2-40B4-BE49-F238E27FC236}">
+                      <a16:creationId xmlns:a16="http://schemas.microsoft.com/office/drawing/2014/main" id="{89228C1D-DF05-4BD8-AF9E-1D10C2CE14C3}"/>
+                    </a:ext>
+                  </a:extLst>
+                </p:cNvPr>
+                <p:cNvPicPr/>
+                <p:nvPr/>
+              </p:nvPicPr>
+              <p:blipFill>
+                <a:blip r:embed="rId3"/>
+                <a:stretch>
+                  <a:fillRect/>
+                </a:stretch>
+              </p:blipFill>
+              <p:spPr>
+                <a:xfrm>
+                  <a:off x="10179155" y="6141035"/>
+                  <a:ext cx="137160" cy="183960"/>
+                </a:xfrm>
+                <a:prstGeom prst="rect">
+                  <a:avLst/>
+                </a:prstGeom>
+              </p:spPr>
+            </p:pic>
+          </mc:Fallback>
+        </mc:AlternateContent>
+        <mc:AlternateContent xmlns:mc="http://schemas.openxmlformats.org/markup-compatibility/2006">
+          <mc:Choice xmlns:p14="http://schemas.microsoft.com/office/powerpoint/2010/main" Requires="p14">
+            <p:contentPart p14:bwMode="auto" r:id="rId4">
+              <p14:nvContentPartPr>
+                <p14:cNvPr id="21" name="잉크 20">
+                  <a:extLst>
+                    <a:ext uri="{FF2B5EF4-FFF2-40B4-BE49-F238E27FC236}">
+                      <a16:creationId xmlns:a16="http://schemas.microsoft.com/office/drawing/2014/main" id="{828DEC62-AAAE-0CC0-5DA8-D95F0167B993}"/>
+                    </a:ext>
+                  </a:extLst>
+                </p14:cNvPr>
+                <p14:cNvContentPartPr/>
+                <p14:nvPr/>
+              </p14:nvContentPartPr>
+              <p14:xfrm>
+                <a:off x="10204355" y="6173075"/>
+                <a:ext cx="90360" cy="30960"/>
+              </p14:xfrm>
+            </p:contentPart>
+          </mc:Choice>
+          <mc:Fallback>
+            <p:pic>
+              <p:nvPicPr>
+                <p:cNvPr id="21" name="잉크 20">
+                  <a:extLst>
+                    <a:ext uri="{FF2B5EF4-FFF2-40B4-BE49-F238E27FC236}">
+                      <a16:creationId xmlns:a16="http://schemas.microsoft.com/office/drawing/2014/main" id="{828DEC62-AAAE-0CC0-5DA8-D95F0167B993}"/>
+                    </a:ext>
+                  </a:extLst>
+                </p:cNvPr>
+                <p:cNvPicPr/>
+                <p:nvPr/>
+              </p:nvPicPr>
+              <p:blipFill>
+                <a:blip r:embed="rId5"/>
+                <a:stretch>
+                  <a:fillRect/>
+                </a:stretch>
+              </p:blipFill>
+              <p:spPr>
+                <a:xfrm>
+                  <a:off x="10195355" y="6164435"/>
+                  <a:ext cx="108000" cy="48600"/>
+                </a:xfrm>
+                <a:prstGeom prst="rect">
+                  <a:avLst/>
+                </a:prstGeom>
+              </p:spPr>
+            </p:pic>
+          </mc:Fallback>
+        </mc:AlternateContent>
+      </p:grpSp>
+      <p:grpSp>
+        <p:nvGrpSpPr>
+          <p:cNvPr id="35" name="그룹 34">
+            <a:extLst>
+              <a:ext uri="{FF2B5EF4-FFF2-40B4-BE49-F238E27FC236}">
+                <a16:creationId xmlns:a16="http://schemas.microsoft.com/office/drawing/2014/main" id="{09F085F9-517D-C2A4-78B8-2D554C417063}"/>
+              </a:ext>
+            </a:extLst>
+          </p:cNvPr>
+          <p:cNvGrpSpPr/>
+          <p:nvPr/>
+        </p:nvGrpSpPr>
+        <p:grpSpPr>
+          <a:xfrm>
+            <a:off x="8248703" y="2876250"/>
+            <a:ext cx="3826440" cy="3179825"/>
+            <a:chOff x="8248703" y="2876250"/>
+            <a:chExt cx="3826440" cy="3179825"/>
+          </a:xfrm>
+        </p:grpSpPr>
+        <p:grpSp>
+          <p:nvGrpSpPr>
+            <p:cNvPr id="14" name="그룹 13">
+              <a:extLst>
+                <a:ext uri="{FF2B5EF4-FFF2-40B4-BE49-F238E27FC236}">
+                  <a16:creationId xmlns:a16="http://schemas.microsoft.com/office/drawing/2014/main" id="{9FD98C59-2FD0-E66D-64AA-50206B48B172}"/>
+                </a:ext>
+              </a:extLst>
+            </p:cNvPr>
+            <p:cNvGrpSpPr/>
+            <p:nvPr/>
+          </p:nvGrpSpPr>
+          <p:grpSpPr>
+            <a:xfrm>
+              <a:off x="8987488" y="3197651"/>
+              <a:ext cx="2525414" cy="2525414"/>
+              <a:chOff x="8845629" y="3256627"/>
+              <a:chExt cx="2525414" cy="2525414"/>
+            </a:xfrm>
+          </p:grpSpPr>
+          <p:cxnSp>
+            <p:nvCxnSpPr>
+              <p:cNvPr id="11" name="직선 연결선 10">
+                <a:extLst>
+                  <a:ext uri="{FF2B5EF4-FFF2-40B4-BE49-F238E27FC236}">
+                    <a16:creationId xmlns:a16="http://schemas.microsoft.com/office/drawing/2014/main" id="{7EA7FD99-086E-14AC-77FF-941C6E0039DB}"/>
+                  </a:ext>
+                </a:extLst>
+              </p:cNvPr>
+              <p:cNvCxnSpPr/>
+              <p:nvPr/>
+            </p:nvCxnSpPr>
+            <p:spPr>
+              <a:xfrm>
+                <a:off x="10106677" y="3262041"/>
+                <a:ext cx="0" cy="2520000"/>
+              </a:xfrm>
+              <a:prstGeom prst="line">
+                <a:avLst/>
+              </a:prstGeom>
+              <a:ln>
+                <a:solidFill>
+                  <a:srgbClr val="FF0000"/>
+                </a:solidFill>
+              </a:ln>
+            </p:spPr>
+            <p:style>
+              <a:lnRef idx="2">
+                <a:schemeClr val="accent1"/>
+              </a:lnRef>
+              <a:fillRef idx="0">
+                <a:schemeClr val="accent1"/>
+              </a:fillRef>
+              <a:effectRef idx="1">
+                <a:schemeClr val="accent1"/>
+              </a:effectRef>
+              <a:fontRef idx="minor">
+                <a:schemeClr val="tx1"/>
+              </a:fontRef>
+            </p:style>
+          </p:cxnSp>
+          <p:cxnSp>
+            <p:nvCxnSpPr>
+              <p:cNvPr id="12" name="직선 연결선 11">
+                <a:extLst>
+                  <a:ext uri="{FF2B5EF4-FFF2-40B4-BE49-F238E27FC236}">
+                    <a16:creationId xmlns:a16="http://schemas.microsoft.com/office/drawing/2014/main" id="{D6437F01-8B85-9BDF-9B61-246E6BA89553}"/>
+                  </a:ext>
+                </a:extLst>
+              </p:cNvPr>
+              <p:cNvCxnSpPr>
+                <a:cxnSpLocks/>
+              </p:cNvCxnSpPr>
+              <p:nvPr/>
+            </p:nvCxnSpPr>
+            <p:spPr>
+              <a:xfrm rot="5400000">
+                <a:off x="10105629" y="3262041"/>
+                <a:ext cx="0" cy="2520000"/>
+              </a:xfrm>
+              <a:prstGeom prst="line">
+                <a:avLst/>
+              </a:prstGeom>
+              <a:ln>
+                <a:solidFill>
+                  <a:srgbClr val="FF0000"/>
+                </a:solidFill>
+              </a:ln>
+            </p:spPr>
+            <p:style>
+              <a:lnRef idx="2">
+                <a:schemeClr val="accent1"/>
+              </a:lnRef>
+              <a:fillRef idx="0">
+                <a:schemeClr val="accent1"/>
+              </a:fillRef>
+              <a:effectRef idx="1">
+                <a:schemeClr val="accent1"/>
+              </a:effectRef>
+              <a:fontRef idx="minor">
+                <a:schemeClr val="tx1"/>
+              </a:fontRef>
+            </p:style>
+          </p:cxnSp>
+          <p:sp>
+            <p:nvSpPr>
+              <p:cNvPr id="9" name="직사각형 8">
+                <a:extLst>
+                  <a:ext uri="{FF2B5EF4-FFF2-40B4-BE49-F238E27FC236}">
+                    <a16:creationId xmlns:a16="http://schemas.microsoft.com/office/drawing/2014/main" id="{2A6C5B93-C5F0-7330-9B4C-27FF69843087}"/>
+                  </a:ext>
+                </a:extLst>
+              </p:cNvPr>
+              <p:cNvSpPr/>
+              <p:nvPr/>
+            </p:nvSpPr>
+            <p:spPr>
+              <a:xfrm>
+                <a:off x="9740216" y="4156628"/>
+                <a:ext cx="730827" cy="730827"/>
+              </a:xfrm>
+              <a:prstGeom prst="rect">
+                <a:avLst/>
+              </a:prstGeom>
+            </p:spPr>
+            <p:style>
+              <a:lnRef idx="2">
+                <a:schemeClr val="accent1">
+                  <a:shade val="15000"/>
+                </a:schemeClr>
+              </a:lnRef>
+              <a:fillRef idx="1">
+                <a:schemeClr val="accent1"/>
+              </a:fillRef>
+              <a:effectRef idx="0">
+                <a:schemeClr val="accent1"/>
+              </a:effectRef>
+              <a:fontRef idx="minor">
+                <a:schemeClr val="lt1"/>
+              </a:fontRef>
+            </p:style>
+            <p:txBody>
+              <a:bodyPr rtlCol="0" anchor="ctr"/>
+              <a:lstStyle/>
+              <a:p>
+                <a:pPr algn="ctr"/>
+                <a:r>
+                  <a:rPr lang="ko-KR" altLang="en-US" sz="1400" b="1" dirty="0"/>
+                  <a:t>몬스터</a:t>
+                </a:r>
+              </a:p>
+            </p:txBody>
+          </p:sp>
+          <p:sp>
+            <p:nvSpPr>
+              <p:cNvPr id="13" name="직사각형 12">
+                <a:extLst>
+                  <a:ext uri="{FF2B5EF4-FFF2-40B4-BE49-F238E27FC236}">
+                    <a16:creationId xmlns:a16="http://schemas.microsoft.com/office/drawing/2014/main" id="{E197BD36-324F-803D-3C4A-A13113D9B5BF}"/>
+                  </a:ext>
+                </a:extLst>
+              </p:cNvPr>
+              <p:cNvSpPr/>
+              <p:nvPr/>
+            </p:nvSpPr>
+            <p:spPr>
+              <a:xfrm>
+                <a:off x="8851054" y="3256627"/>
+                <a:ext cx="2519989" cy="2519989"/>
+              </a:xfrm>
+              <a:prstGeom prst="rect">
+                <a:avLst/>
+              </a:prstGeom>
+              <a:noFill/>
+              <a:ln>
+                <a:solidFill>
+                  <a:srgbClr val="FF0000">
+                    <a:alpha val="50196"/>
+                  </a:srgbClr>
+                </a:solidFill>
+              </a:ln>
+            </p:spPr>
+            <p:style>
+              <a:lnRef idx="2">
+                <a:schemeClr val="accent1">
+                  <a:shade val="15000"/>
+                </a:schemeClr>
+              </a:lnRef>
+              <a:fillRef idx="1">
+                <a:schemeClr val="accent1"/>
+              </a:fillRef>
+              <a:effectRef idx="0">
+                <a:schemeClr val="accent1"/>
+              </a:effectRef>
+              <a:fontRef idx="minor">
+                <a:schemeClr val="lt1"/>
+              </a:fontRef>
+            </p:style>
+            <p:txBody>
+              <a:bodyPr rtlCol="0" anchor="ctr"/>
+              <a:lstStyle/>
+              <a:p>
+                <a:pPr algn="ctr"/>
+                <a:endParaRPr lang="ko-KR" altLang="en-US" dirty="0"/>
+              </a:p>
+            </p:txBody>
+          </p:sp>
+        </p:grpSp>
+        <mc:AlternateContent xmlns:mc="http://schemas.openxmlformats.org/markup-compatibility/2006">
+          <mc:Choice xmlns:p14="http://schemas.microsoft.com/office/powerpoint/2010/main" Requires="p14">
+            <p:contentPart p14:bwMode="auto" r:id="rId6">
+              <p14:nvContentPartPr>
+                <p14:cNvPr id="15" name="잉크 14">
+                  <a:extLst>
+                    <a:ext uri="{FF2B5EF4-FFF2-40B4-BE49-F238E27FC236}">
+                      <a16:creationId xmlns:a16="http://schemas.microsoft.com/office/drawing/2014/main" id="{695948E1-3914-DFBD-98D5-54D6FBEDE180}"/>
+                    </a:ext>
+                  </a:extLst>
+                </p14:cNvPr>
+                <p14:cNvContentPartPr/>
+                <p14:nvPr/>
+              </p14:nvContentPartPr>
+              <p14:xfrm>
+                <a:off x="8997995" y="5737115"/>
+                <a:ext cx="2520720" cy="318960"/>
+              </p14:xfrm>
+            </p:contentPart>
+          </mc:Choice>
+          <mc:Fallback>
+            <p:pic>
+              <p:nvPicPr>
+                <p:cNvPr id="15" name="잉크 14">
+                  <a:extLst>
+                    <a:ext uri="{FF2B5EF4-FFF2-40B4-BE49-F238E27FC236}">
+                      <a16:creationId xmlns:a16="http://schemas.microsoft.com/office/drawing/2014/main" id="{695948E1-3914-DFBD-98D5-54D6FBEDE180}"/>
+                    </a:ext>
+                  </a:extLst>
+                </p:cNvPr>
+                <p:cNvPicPr/>
+                <p:nvPr/>
+              </p:nvPicPr>
+              <p:blipFill>
+                <a:blip r:embed="rId7"/>
+                <a:stretch>
+                  <a:fillRect/>
+                </a:stretch>
+              </p:blipFill>
+              <p:spPr>
+                <a:xfrm>
+                  <a:off x="8988995" y="5728115"/>
+                  <a:ext cx="2538360" cy="336600"/>
+                </a:xfrm>
+                <a:prstGeom prst="rect">
+                  <a:avLst/>
+                </a:prstGeom>
+              </p:spPr>
+            </p:pic>
+          </mc:Fallback>
+        </mc:AlternateContent>
+        <p:grpSp>
+          <p:nvGrpSpPr>
+            <p:cNvPr id="26" name="그룹 25">
+              <a:extLst>
+                <a:ext uri="{FF2B5EF4-FFF2-40B4-BE49-F238E27FC236}">
+                  <a16:creationId xmlns:a16="http://schemas.microsoft.com/office/drawing/2014/main" id="{B82E1A09-7C8E-982E-2785-49F70C11313D}"/>
+                </a:ext>
+              </a:extLst>
+            </p:cNvPr>
+            <p:cNvGrpSpPr/>
+            <p:nvPr/>
+          </p:nvGrpSpPr>
+          <p:grpSpPr>
+            <a:xfrm>
+              <a:off x="8248703" y="3185850"/>
+              <a:ext cx="762120" cy="2538720"/>
+              <a:chOff x="8248703" y="3185850"/>
+              <a:chExt cx="762120" cy="2538720"/>
+            </a:xfrm>
+          </p:grpSpPr>
+          <mc:AlternateContent xmlns:mc="http://schemas.openxmlformats.org/markup-compatibility/2006">
+            <mc:Choice xmlns:p14="http://schemas.microsoft.com/office/powerpoint/2010/main" Requires="p14">
+              <p:contentPart p14:bwMode="auto" r:id="rId8">
+                <p14:nvContentPartPr>
+                  <p14:cNvPr id="23" name="잉크 22">
+                    <a:extLst>
+                      <a:ext uri="{FF2B5EF4-FFF2-40B4-BE49-F238E27FC236}">
+                        <a16:creationId xmlns:a16="http://schemas.microsoft.com/office/drawing/2014/main" id="{8D8D22B8-0077-4F06-D90F-3019729226A7}"/>
+                      </a:ext>
+                    </a:extLst>
+                  </p14:cNvPr>
+                  <p14:cNvContentPartPr/>
+                  <p14:nvPr/>
+                </p14:nvContentPartPr>
+                <p14:xfrm>
+                  <a:off x="8656943" y="3185850"/>
+                  <a:ext cx="353880" cy="2538720"/>
+                </p14:xfrm>
+              </p:contentPart>
+            </mc:Choice>
+            <mc:Fallback>
+              <p:pic>
+                <p:nvPicPr>
+                  <p:cNvPr id="23" name="잉크 22">
+                    <a:extLst>
+                      <a:ext uri="{FF2B5EF4-FFF2-40B4-BE49-F238E27FC236}">
+                        <a16:creationId xmlns:a16="http://schemas.microsoft.com/office/drawing/2014/main" id="{8D8D22B8-0077-4F06-D90F-3019729226A7}"/>
+                      </a:ext>
+                    </a:extLst>
+                  </p:cNvPr>
+                  <p:cNvPicPr/>
+                  <p:nvPr/>
+                </p:nvPicPr>
+                <p:blipFill>
+                  <a:blip r:embed="rId9"/>
+                  <a:stretch>
+                    <a:fillRect/>
+                  </a:stretch>
+                </p:blipFill>
+                <p:spPr>
+                  <a:xfrm>
+                    <a:off x="8648303" y="3177210"/>
+                    <a:ext cx="371520" cy="2556360"/>
+                  </a:xfrm>
+                  <a:prstGeom prst="rect">
+                    <a:avLst/>
+                  </a:prstGeom>
+                </p:spPr>
+              </p:pic>
+            </mc:Fallback>
+          </mc:AlternateContent>
+          <mc:AlternateContent xmlns:mc="http://schemas.openxmlformats.org/markup-compatibility/2006">
+            <mc:Choice xmlns:p14="http://schemas.microsoft.com/office/powerpoint/2010/main" Requires="p14">
+              <p:contentPart p14:bwMode="auto" r:id="rId10">
+                <p14:nvContentPartPr>
+                  <p14:cNvPr id="24" name="잉크 23">
+                    <a:extLst>
+                      <a:ext uri="{FF2B5EF4-FFF2-40B4-BE49-F238E27FC236}">
+                        <a16:creationId xmlns:a16="http://schemas.microsoft.com/office/drawing/2014/main" id="{71BCA669-1683-A5FE-8474-A43AFB159B5B}"/>
+                      </a:ext>
+                    </a:extLst>
+                  </p14:cNvPr>
+                  <p14:cNvContentPartPr/>
+                  <p14:nvPr/>
+                </p14:nvContentPartPr>
+                <p14:xfrm>
+                  <a:off x="8248703" y="4133730"/>
+                  <a:ext cx="173160" cy="332280"/>
+                </p14:xfrm>
+              </p:contentPart>
+            </mc:Choice>
+            <mc:Fallback>
+              <p:pic>
+                <p:nvPicPr>
+                  <p:cNvPr id="24" name="잉크 23">
+                    <a:extLst>
+                      <a:ext uri="{FF2B5EF4-FFF2-40B4-BE49-F238E27FC236}">
+                        <a16:creationId xmlns:a16="http://schemas.microsoft.com/office/drawing/2014/main" id="{71BCA669-1683-A5FE-8474-A43AFB159B5B}"/>
+                      </a:ext>
+                    </a:extLst>
+                  </p:cNvPr>
+                  <p:cNvPicPr/>
+                  <p:nvPr/>
+                </p:nvPicPr>
+                <p:blipFill>
+                  <a:blip r:embed="rId11"/>
+                  <a:stretch>
+                    <a:fillRect/>
+                  </a:stretch>
+                </p:blipFill>
+                <p:spPr>
+                  <a:xfrm>
+                    <a:off x="8239703" y="4124730"/>
+                    <a:ext cx="190800" cy="349920"/>
+                  </a:xfrm>
+                  <a:prstGeom prst="rect">
+                    <a:avLst/>
+                  </a:prstGeom>
+                </p:spPr>
+              </p:pic>
+            </mc:Fallback>
+          </mc:AlternateContent>
+          <mc:AlternateContent xmlns:mc="http://schemas.openxmlformats.org/markup-compatibility/2006">
+            <mc:Choice xmlns:p14="http://schemas.microsoft.com/office/powerpoint/2010/main" Requires="p14">
+              <p:contentPart p14:bwMode="auto" r:id="rId12">
+                <p14:nvContentPartPr>
+                  <p14:cNvPr id="25" name="잉크 24">
+                    <a:extLst>
+                      <a:ext uri="{FF2B5EF4-FFF2-40B4-BE49-F238E27FC236}">
+                        <a16:creationId xmlns:a16="http://schemas.microsoft.com/office/drawing/2014/main" id="{139D8099-9E4A-E73D-52B6-1BEC754AFCD3}"/>
+                      </a:ext>
+                    </a:extLst>
+                  </p14:cNvPr>
+                  <p14:cNvContentPartPr/>
+                  <p14:nvPr/>
+                </p14:nvContentPartPr>
+                <p14:xfrm>
+                  <a:off x="8272463" y="4181970"/>
+                  <a:ext cx="110160" cy="42480"/>
+                </p14:xfrm>
+              </p:contentPart>
+            </mc:Choice>
+            <mc:Fallback>
+              <p:pic>
+                <p:nvPicPr>
+                  <p:cNvPr id="25" name="잉크 24">
+                    <a:extLst>
+                      <a:ext uri="{FF2B5EF4-FFF2-40B4-BE49-F238E27FC236}">
+                        <a16:creationId xmlns:a16="http://schemas.microsoft.com/office/drawing/2014/main" id="{139D8099-9E4A-E73D-52B6-1BEC754AFCD3}"/>
+                      </a:ext>
+                    </a:extLst>
+                  </p:cNvPr>
+                  <p:cNvPicPr/>
+                  <p:nvPr/>
+                </p:nvPicPr>
+                <p:blipFill>
+                  <a:blip r:embed="rId13"/>
+                  <a:stretch>
+                    <a:fillRect/>
+                  </a:stretch>
+                </p:blipFill>
+                <p:spPr>
+                  <a:xfrm>
+                    <a:off x="8263463" y="4172970"/>
+                    <a:ext cx="127800" cy="60120"/>
+                  </a:xfrm>
+                  <a:prstGeom prst="rect">
+                    <a:avLst/>
+                  </a:prstGeom>
+                </p:spPr>
+              </p:pic>
+            </mc:Fallback>
+          </mc:AlternateContent>
+        </p:grpSp>
+        <p:grpSp>
+          <p:nvGrpSpPr>
+            <p:cNvPr id="31" name="그룹 30">
+              <a:extLst>
+                <a:ext uri="{FF2B5EF4-FFF2-40B4-BE49-F238E27FC236}">
+                  <a16:creationId xmlns:a16="http://schemas.microsoft.com/office/drawing/2014/main" id="{EF1AD025-9B4A-1234-252A-F9AC683C7E10}"/>
+                </a:ext>
+              </a:extLst>
+            </p:cNvPr>
+            <p:cNvGrpSpPr/>
+            <p:nvPr/>
+          </p:nvGrpSpPr>
+          <p:grpSpPr>
+            <a:xfrm>
+              <a:off x="11605703" y="2876250"/>
+              <a:ext cx="469440" cy="318240"/>
+              <a:chOff x="11605703" y="2876250"/>
+              <a:chExt cx="469440" cy="318240"/>
+            </a:xfrm>
+          </p:grpSpPr>
+          <mc:AlternateContent xmlns:mc="http://schemas.openxmlformats.org/markup-compatibility/2006">
+            <mc:Choice xmlns:p14="http://schemas.microsoft.com/office/powerpoint/2010/main" Requires="p14">
+              <p:contentPart p14:bwMode="auto" r:id="rId14">
+                <p14:nvContentPartPr>
+                  <p14:cNvPr id="27" name="잉크 26">
+                    <a:extLst>
+                      <a:ext uri="{FF2B5EF4-FFF2-40B4-BE49-F238E27FC236}">
+                        <a16:creationId xmlns:a16="http://schemas.microsoft.com/office/drawing/2014/main" id="{DBE651CF-F231-70E5-C41E-8F3AC3EEB97B}"/>
+                      </a:ext>
+                    </a:extLst>
+                  </p14:cNvPr>
+                  <p14:cNvContentPartPr/>
+                  <p14:nvPr/>
+                </p14:nvContentPartPr>
+                <p14:xfrm>
+                  <a:off x="11605703" y="2876250"/>
+                  <a:ext cx="110160" cy="286200"/>
+                </p14:xfrm>
+              </p:contentPart>
+            </mc:Choice>
+            <mc:Fallback>
+              <p:pic>
+                <p:nvPicPr>
+                  <p:cNvPr id="27" name="잉크 26">
+                    <a:extLst>
+                      <a:ext uri="{FF2B5EF4-FFF2-40B4-BE49-F238E27FC236}">
+                        <a16:creationId xmlns:a16="http://schemas.microsoft.com/office/drawing/2014/main" id="{DBE651CF-F231-70E5-C41E-8F3AC3EEB97B}"/>
+                      </a:ext>
+                    </a:extLst>
+                  </p:cNvPr>
+                  <p:cNvPicPr/>
+                  <p:nvPr/>
+                </p:nvPicPr>
+                <p:blipFill>
+                  <a:blip r:embed="rId15"/>
+                  <a:stretch>
+                    <a:fillRect/>
+                  </a:stretch>
+                </p:blipFill>
+                <p:spPr>
+                  <a:xfrm>
+                    <a:off x="11596703" y="2867610"/>
+                    <a:ext cx="127800" cy="303840"/>
+                  </a:xfrm>
+                  <a:prstGeom prst="rect">
+                    <a:avLst/>
+                  </a:prstGeom>
+                </p:spPr>
+              </p:pic>
+            </mc:Fallback>
+          </mc:AlternateContent>
+          <mc:AlternateContent xmlns:mc="http://schemas.openxmlformats.org/markup-compatibility/2006">
+            <mc:Choice xmlns:p14="http://schemas.microsoft.com/office/powerpoint/2010/main" Requires="p14">
+              <p:contentPart p14:bwMode="auto" r:id="rId16">
+                <p14:nvContentPartPr>
+                  <p14:cNvPr id="28" name="잉크 27">
+                    <a:extLst>
+                      <a:ext uri="{FF2B5EF4-FFF2-40B4-BE49-F238E27FC236}">
+                        <a16:creationId xmlns:a16="http://schemas.microsoft.com/office/drawing/2014/main" id="{D255303C-7BEE-9E38-87F7-F14D89280309}"/>
+                      </a:ext>
+                    </a:extLst>
+                  </p14:cNvPr>
+                  <p14:cNvContentPartPr/>
+                  <p14:nvPr/>
+                </p14:nvContentPartPr>
+                <p14:xfrm>
+                  <a:off x="11728103" y="2933490"/>
+                  <a:ext cx="203040" cy="185760"/>
+                </p14:xfrm>
+              </p:contentPart>
+            </mc:Choice>
+            <mc:Fallback>
+              <p:pic>
+                <p:nvPicPr>
+                  <p:cNvPr id="28" name="잉크 27">
+                    <a:extLst>
+                      <a:ext uri="{FF2B5EF4-FFF2-40B4-BE49-F238E27FC236}">
+                        <a16:creationId xmlns:a16="http://schemas.microsoft.com/office/drawing/2014/main" id="{D255303C-7BEE-9E38-87F7-F14D89280309}"/>
+                      </a:ext>
+                    </a:extLst>
+                  </p:cNvPr>
+                  <p:cNvPicPr/>
+                  <p:nvPr/>
+                </p:nvPicPr>
+                <p:blipFill>
+                  <a:blip r:embed="rId17"/>
+                  <a:stretch>
+                    <a:fillRect/>
+                  </a:stretch>
+                </p:blipFill>
+                <p:spPr>
+                  <a:xfrm>
+                    <a:off x="11719463" y="2924490"/>
+                    <a:ext cx="220680" cy="203400"/>
+                  </a:xfrm>
+                  <a:prstGeom prst="rect">
+                    <a:avLst/>
+                  </a:prstGeom>
+                </p:spPr>
+              </p:pic>
+            </mc:Fallback>
+          </mc:AlternateContent>
+          <mc:AlternateContent xmlns:mc="http://schemas.openxmlformats.org/markup-compatibility/2006">
+            <mc:Choice xmlns:p14="http://schemas.microsoft.com/office/powerpoint/2010/main" Requires="p14">
+              <p:contentPart p14:bwMode="auto" r:id="rId18">
+                <p14:nvContentPartPr>
+                  <p14:cNvPr id="30" name="잉크 29">
+                    <a:extLst>
+                      <a:ext uri="{FF2B5EF4-FFF2-40B4-BE49-F238E27FC236}">
+                        <a16:creationId xmlns:a16="http://schemas.microsoft.com/office/drawing/2014/main" id="{2030E3B1-0337-2DEF-31BD-4C8175852874}"/>
+                      </a:ext>
+                    </a:extLst>
+                  </p14:cNvPr>
+                  <p14:cNvContentPartPr/>
+                  <p14:nvPr/>
+                </p14:nvContentPartPr>
+                <p14:xfrm>
+                  <a:off x="11968223" y="2899290"/>
+                  <a:ext cx="106920" cy="295200"/>
+                </p14:xfrm>
+              </p:contentPart>
+            </mc:Choice>
+            <mc:Fallback>
+              <p:pic>
+                <p:nvPicPr>
+                  <p:cNvPr id="30" name="잉크 29">
+                    <a:extLst>
+                      <a:ext uri="{FF2B5EF4-FFF2-40B4-BE49-F238E27FC236}">
+                        <a16:creationId xmlns:a16="http://schemas.microsoft.com/office/drawing/2014/main" id="{2030E3B1-0337-2DEF-31BD-4C8175852874}"/>
+                      </a:ext>
+                    </a:extLst>
+                  </p:cNvPr>
+                  <p:cNvPicPr/>
+                  <p:nvPr/>
+                </p:nvPicPr>
+                <p:blipFill>
+                  <a:blip r:embed="rId19"/>
+                  <a:stretch>
+                    <a:fillRect/>
+                  </a:stretch>
+                </p:blipFill>
+                <p:spPr>
+                  <a:xfrm>
+                    <a:off x="11959223" y="2890650"/>
+                    <a:ext cx="124560" cy="312840"/>
+                  </a:xfrm>
+                  <a:prstGeom prst="rect">
+                    <a:avLst/>
+                  </a:prstGeom>
+                </p:spPr>
+              </p:pic>
+            </mc:Fallback>
+          </mc:AlternateContent>
+        </p:grpSp>
+      </p:grpSp>
+      <p:grpSp>
+        <p:nvGrpSpPr>
+          <p:cNvPr id="34" name="그룹 33">
+            <a:extLst>
+              <a:ext uri="{FF2B5EF4-FFF2-40B4-BE49-F238E27FC236}">
+                <a16:creationId xmlns:a16="http://schemas.microsoft.com/office/drawing/2014/main" id="{101AA0B9-9652-37C7-C212-8B55319FE726}"/>
+              </a:ext>
+            </a:extLst>
+          </p:cNvPr>
+          <p:cNvGrpSpPr/>
+          <p:nvPr/>
+        </p:nvGrpSpPr>
+        <p:grpSpPr>
+          <a:xfrm>
+            <a:off x="7951705" y="2104749"/>
+            <a:ext cx="499680" cy="821520"/>
+            <a:chOff x="7951705" y="2104749"/>
+            <a:chExt cx="499680" cy="821520"/>
+          </a:xfrm>
+        </p:grpSpPr>
+        <mc:AlternateContent xmlns:mc="http://schemas.openxmlformats.org/markup-compatibility/2006">
+          <mc:Choice xmlns:p14="http://schemas.microsoft.com/office/powerpoint/2010/main" Requires="p14">
+            <p:contentPart p14:bwMode="auto" r:id="rId20">
+              <p14:nvContentPartPr>
+                <p14:cNvPr id="32" name="잉크 31">
+                  <a:extLst>
+                    <a:ext uri="{FF2B5EF4-FFF2-40B4-BE49-F238E27FC236}">
+                      <a16:creationId xmlns:a16="http://schemas.microsoft.com/office/drawing/2014/main" id="{3C754619-5ED5-2023-80D1-64695AD47F32}"/>
+                    </a:ext>
+                  </a:extLst>
+                </p14:cNvPr>
+                <p14:cNvContentPartPr/>
+                <p14:nvPr/>
+              </p14:nvContentPartPr>
+              <p14:xfrm>
+                <a:off x="8238265" y="2104749"/>
+                <a:ext cx="213120" cy="319320"/>
+              </p14:xfrm>
+            </p:contentPart>
+          </mc:Choice>
+          <mc:Fallback>
+            <p:pic>
+              <p:nvPicPr>
+                <p:cNvPr id="32" name="잉크 31">
+                  <a:extLst>
+                    <a:ext uri="{FF2B5EF4-FFF2-40B4-BE49-F238E27FC236}">
+                      <a16:creationId xmlns:a16="http://schemas.microsoft.com/office/drawing/2014/main" id="{3C754619-5ED5-2023-80D1-64695AD47F32}"/>
+                    </a:ext>
+                  </a:extLst>
+                </p:cNvPr>
+                <p:cNvPicPr/>
+                <p:nvPr/>
+              </p:nvPicPr>
+              <p:blipFill>
+                <a:blip r:embed="rId21"/>
+                <a:stretch>
+                  <a:fillRect/>
+                </a:stretch>
+              </p:blipFill>
+              <p:spPr>
+                <a:xfrm>
+                  <a:off x="8229625" y="2095749"/>
+                  <a:ext cx="230760" cy="336960"/>
+                </a:xfrm>
+                <a:prstGeom prst="rect">
+                  <a:avLst/>
+                </a:prstGeom>
+              </p:spPr>
+            </p:pic>
+          </mc:Fallback>
+        </mc:AlternateContent>
+        <mc:AlternateContent xmlns:mc="http://schemas.openxmlformats.org/markup-compatibility/2006">
+          <mc:Choice xmlns:p14="http://schemas.microsoft.com/office/powerpoint/2010/main" Requires="p14">
+            <p:contentPart p14:bwMode="auto" r:id="rId22">
+              <p14:nvContentPartPr>
+                <p14:cNvPr id="33" name="잉크 32">
+                  <a:extLst>
+                    <a:ext uri="{FF2B5EF4-FFF2-40B4-BE49-F238E27FC236}">
+                      <a16:creationId xmlns:a16="http://schemas.microsoft.com/office/drawing/2014/main" id="{6C753CBC-D0A1-6B5E-D71C-9887B27B1C1E}"/>
+                    </a:ext>
+                  </a:extLst>
+                </p14:cNvPr>
+                <p14:cNvContentPartPr/>
+                <p14:nvPr/>
+              </p14:nvContentPartPr>
+              <p14:xfrm>
+                <a:off x="7951705" y="2281149"/>
+                <a:ext cx="316800" cy="645120"/>
+              </p14:xfrm>
+            </p:contentPart>
+          </mc:Choice>
+          <mc:Fallback>
+            <p:pic>
+              <p:nvPicPr>
+                <p:cNvPr id="33" name="잉크 32">
+                  <a:extLst>
+                    <a:ext uri="{FF2B5EF4-FFF2-40B4-BE49-F238E27FC236}">
+                      <a16:creationId xmlns:a16="http://schemas.microsoft.com/office/drawing/2014/main" id="{6C753CBC-D0A1-6B5E-D71C-9887B27B1C1E}"/>
+                    </a:ext>
+                  </a:extLst>
+                </p:cNvPr>
+                <p:cNvPicPr/>
+                <p:nvPr/>
+              </p:nvPicPr>
+              <p:blipFill>
+                <a:blip r:embed="rId23"/>
+                <a:stretch>
+                  <a:fillRect/>
+                </a:stretch>
+              </p:blipFill>
+              <p:spPr>
+                <a:xfrm>
+                  <a:off x="7942705" y="2272509"/>
+                  <a:ext cx="334440" cy="662760"/>
+                </a:xfrm>
+                <a:prstGeom prst="rect">
+                  <a:avLst/>
+                </a:prstGeom>
+              </p:spPr>
+            </p:pic>
+          </mc:Fallback>
+        </mc:AlternateContent>
+      </p:grpSp>
     </p:spTree>
     <p:extLst>
       <p:ext uri="{BB962C8B-B14F-4D97-AF65-F5344CB8AC3E}">
@@ -9824,8 +10966,8 @@
               <a:chExt cx="468360" cy="528840"/>
             </a:xfrm>
           </p:grpSpPr>
-          <mc:AlternateContent xmlns:mc="http://schemas.openxmlformats.org/markup-compatibility/2006">
-            <mc:Choice xmlns:p14="http://schemas.microsoft.com/office/powerpoint/2010/main" Requires="p14">
+          <mc:AlternateContent xmlns:mc="http://schemas.openxmlformats.org/markup-compatibility/2006" xmlns:p14="http://schemas.microsoft.com/office/powerpoint/2010/main">
+            <mc:Choice Requires="p14">
               <p:contentPart p14:bwMode="auto" r:id="rId3">
                 <p14:nvContentPartPr>
                   <p14:cNvPr id="11" name="잉크 10">
@@ -9844,7 +10986,7 @@
                 </p14:xfrm>
               </p:contentPart>
             </mc:Choice>
-            <mc:Fallback>
+            <mc:Fallback xmlns="">
               <p:pic>
                 <p:nvPicPr>
                   <p:cNvPr id="11" name="잉크 10">
@@ -9875,8 +11017,8 @@
               </p:pic>
             </mc:Fallback>
           </mc:AlternateContent>
-          <mc:AlternateContent xmlns:mc="http://schemas.openxmlformats.org/markup-compatibility/2006">
-            <mc:Choice xmlns:p14="http://schemas.microsoft.com/office/powerpoint/2010/main" Requires="p14">
+          <mc:AlternateContent xmlns:mc="http://schemas.openxmlformats.org/markup-compatibility/2006" xmlns:p14="http://schemas.microsoft.com/office/powerpoint/2010/main">
+            <mc:Choice Requires="p14">
               <p:contentPart p14:bwMode="auto" r:id="rId5">
                 <p14:nvContentPartPr>
                   <p14:cNvPr id="12" name="잉크 11">
@@ -9895,7 +11037,7 @@
                 </p14:xfrm>
               </p:contentPart>
             </mc:Choice>
-            <mc:Fallback>
+            <mc:Fallback xmlns="">
               <p:pic>
                 <p:nvPicPr>
                   <p:cNvPr id="12" name="잉크 11">
@@ -9926,8 +11068,8 @@
               </p:pic>
             </mc:Fallback>
           </mc:AlternateContent>
-          <mc:AlternateContent xmlns:mc="http://schemas.openxmlformats.org/markup-compatibility/2006">
-            <mc:Choice xmlns:p14="http://schemas.microsoft.com/office/powerpoint/2010/main" Requires="p14">
+          <mc:AlternateContent xmlns:mc="http://schemas.openxmlformats.org/markup-compatibility/2006" xmlns:p14="http://schemas.microsoft.com/office/powerpoint/2010/main">
+            <mc:Choice Requires="p14">
               <p:contentPart p14:bwMode="auto" r:id="rId7">
                 <p14:nvContentPartPr>
                   <p14:cNvPr id="13" name="잉크 12">
@@ -9946,7 +11088,7 @@
                 </p14:xfrm>
               </p:contentPart>
             </mc:Choice>
-            <mc:Fallback>
+            <mc:Fallback xmlns="">
               <p:pic>
                 <p:nvPicPr>
                   <p:cNvPr id="13" name="잉크 12">
@@ -9977,8 +11119,8 @@
               </p:pic>
             </mc:Fallback>
           </mc:AlternateContent>
-          <mc:AlternateContent xmlns:mc="http://schemas.openxmlformats.org/markup-compatibility/2006">
-            <mc:Choice xmlns:p14="http://schemas.microsoft.com/office/powerpoint/2010/main" Requires="p14">
+          <mc:AlternateContent xmlns:mc="http://schemas.openxmlformats.org/markup-compatibility/2006" xmlns:p14="http://schemas.microsoft.com/office/powerpoint/2010/main">
+            <mc:Choice Requires="p14">
               <p:contentPart p14:bwMode="auto" r:id="rId8">
                 <p14:nvContentPartPr>
                   <p14:cNvPr id="14" name="잉크 13">
@@ -9997,7 +11139,7 @@
                 </p14:xfrm>
               </p:contentPart>
             </mc:Choice>
-            <mc:Fallback>
+            <mc:Fallback xmlns="">
               <p:pic>
                 <p:nvPicPr>
                   <p:cNvPr id="14" name="잉크 13">
@@ -10049,8 +11191,8 @@
               <a:chExt cx="534960" cy="610560"/>
             </a:xfrm>
           </p:grpSpPr>
-          <mc:AlternateContent xmlns:mc="http://schemas.openxmlformats.org/markup-compatibility/2006">
-            <mc:Choice xmlns:p14="http://schemas.microsoft.com/office/powerpoint/2010/main" Requires="p14">
+          <mc:AlternateContent xmlns:mc="http://schemas.openxmlformats.org/markup-compatibility/2006" xmlns:p14="http://schemas.microsoft.com/office/powerpoint/2010/main">
+            <mc:Choice Requires="p14">
               <p:contentPart p14:bwMode="auto" r:id="rId10">
                 <p14:nvContentPartPr>
                   <p14:cNvPr id="16" name="잉크 15">
@@ -10069,7 +11211,7 @@
                 </p14:xfrm>
               </p:contentPart>
             </mc:Choice>
-            <mc:Fallback>
+            <mc:Fallback xmlns="">
               <p:pic>
                 <p:nvPicPr>
                   <p:cNvPr id="16" name="잉크 15">
@@ -10100,8 +11242,8 @@
               </p:pic>
             </mc:Fallback>
           </mc:AlternateContent>
-          <mc:AlternateContent xmlns:mc="http://schemas.openxmlformats.org/markup-compatibility/2006">
-            <mc:Choice xmlns:p14="http://schemas.microsoft.com/office/powerpoint/2010/main" Requires="p14">
+          <mc:AlternateContent xmlns:mc="http://schemas.openxmlformats.org/markup-compatibility/2006" xmlns:p14="http://schemas.microsoft.com/office/powerpoint/2010/main">
+            <mc:Choice Requires="p14">
               <p:contentPart p14:bwMode="auto" r:id="rId12">
                 <p14:nvContentPartPr>
                   <p14:cNvPr id="17" name="잉크 16">
@@ -10120,7 +11262,7 @@
                 </p14:xfrm>
               </p:contentPart>
             </mc:Choice>
-            <mc:Fallback>
+            <mc:Fallback xmlns="">
               <p:pic>
                 <p:nvPicPr>
                   <p:cNvPr id="17" name="잉크 16">
@@ -10151,8 +11293,8 @@
               </p:pic>
             </mc:Fallback>
           </mc:AlternateContent>
-          <mc:AlternateContent xmlns:mc="http://schemas.openxmlformats.org/markup-compatibility/2006">
-            <mc:Choice xmlns:p14="http://schemas.microsoft.com/office/powerpoint/2010/main" Requires="p14">
+          <mc:AlternateContent xmlns:mc="http://schemas.openxmlformats.org/markup-compatibility/2006" xmlns:p14="http://schemas.microsoft.com/office/powerpoint/2010/main">
+            <mc:Choice Requires="p14">
               <p:contentPart p14:bwMode="auto" r:id="rId13">
                 <p14:nvContentPartPr>
                   <p14:cNvPr id="18" name="잉크 17">
@@ -10171,7 +11313,7 @@
                 </p14:xfrm>
               </p:contentPart>
             </mc:Choice>
-            <mc:Fallback>
+            <mc:Fallback xmlns="">
               <p:pic>
                 <p:nvPicPr>
                   <p:cNvPr id="18" name="잉크 17">
@@ -10202,8 +11344,8 @@
               </p:pic>
             </mc:Fallback>
           </mc:AlternateContent>
-          <mc:AlternateContent xmlns:mc="http://schemas.openxmlformats.org/markup-compatibility/2006">
-            <mc:Choice xmlns:p14="http://schemas.microsoft.com/office/powerpoint/2010/main" Requires="p14">
+          <mc:AlternateContent xmlns:mc="http://schemas.openxmlformats.org/markup-compatibility/2006" xmlns:p14="http://schemas.microsoft.com/office/powerpoint/2010/main">
+            <mc:Choice Requires="p14">
               <p:contentPart p14:bwMode="auto" r:id="rId14">
                 <p14:nvContentPartPr>
                   <p14:cNvPr id="19" name="잉크 18">
@@ -10222,7 +11364,7 @@
                 </p14:xfrm>
               </p:contentPart>
             </mc:Choice>
-            <mc:Fallback>
+            <mc:Fallback xmlns="">
               <p:pic>
                 <p:nvPicPr>
                   <p:cNvPr id="19" name="잉크 18">
@@ -10274,8 +11416,8 @@
               <a:chExt cx="536040" cy="604800"/>
             </a:xfrm>
           </p:grpSpPr>
-          <mc:AlternateContent xmlns:mc="http://schemas.openxmlformats.org/markup-compatibility/2006">
-            <mc:Choice xmlns:p14="http://schemas.microsoft.com/office/powerpoint/2010/main" Requires="p14">
+          <mc:AlternateContent xmlns:mc="http://schemas.openxmlformats.org/markup-compatibility/2006" xmlns:p14="http://schemas.microsoft.com/office/powerpoint/2010/main">
+            <mc:Choice Requires="p14">
               <p:contentPart p14:bwMode="auto" r:id="rId16">
                 <p14:nvContentPartPr>
                   <p14:cNvPr id="31" name="잉크 30">
@@ -10294,7 +11436,7 @@
                 </p14:xfrm>
               </p:contentPart>
             </mc:Choice>
-            <mc:Fallback>
+            <mc:Fallback xmlns="">
               <p:pic>
                 <p:nvPicPr>
                   <p:cNvPr id="31" name="잉크 30">
@@ -10325,8 +11467,8 @@
               </p:pic>
             </mc:Fallback>
           </mc:AlternateContent>
-          <mc:AlternateContent xmlns:mc="http://schemas.openxmlformats.org/markup-compatibility/2006">
-            <mc:Choice xmlns:p14="http://schemas.microsoft.com/office/powerpoint/2010/main" Requires="p14">
+          <mc:AlternateContent xmlns:mc="http://schemas.openxmlformats.org/markup-compatibility/2006" xmlns:p14="http://schemas.microsoft.com/office/powerpoint/2010/main">
+            <mc:Choice Requires="p14">
               <p:contentPart p14:bwMode="auto" r:id="rId18">
                 <p14:nvContentPartPr>
                   <p14:cNvPr id="21" name="잉크 20">
@@ -10345,7 +11487,7 @@
                 </p14:xfrm>
               </p:contentPart>
             </mc:Choice>
-            <mc:Fallback>
+            <mc:Fallback xmlns="">
               <p:pic>
                 <p:nvPicPr>
                   <p:cNvPr id="21" name="잉크 20">
@@ -10376,8 +11518,8 @@
               </p:pic>
             </mc:Fallback>
           </mc:AlternateContent>
-          <mc:AlternateContent xmlns:mc="http://schemas.openxmlformats.org/markup-compatibility/2006">
-            <mc:Choice xmlns:p14="http://schemas.microsoft.com/office/powerpoint/2010/main" Requires="p14">
+          <mc:AlternateContent xmlns:mc="http://schemas.openxmlformats.org/markup-compatibility/2006" xmlns:p14="http://schemas.microsoft.com/office/powerpoint/2010/main">
+            <mc:Choice Requires="p14">
               <p:contentPart p14:bwMode="auto" r:id="rId20">
                 <p14:nvContentPartPr>
                   <p14:cNvPr id="22" name="잉크 21">
@@ -10396,7 +11538,7 @@
                 </p14:xfrm>
               </p:contentPart>
             </mc:Choice>
-            <mc:Fallback>
+            <mc:Fallback xmlns="">
               <p:pic>
                 <p:nvPicPr>
                   <p:cNvPr id="22" name="잉크 21">
@@ -10427,8 +11569,8 @@
               </p:pic>
             </mc:Fallback>
           </mc:AlternateContent>
-          <mc:AlternateContent xmlns:mc="http://schemas.openxmlformats.org/markup-compatibility/2006">
-            <mc:Choice xmlns:p14="http://schemas.microsoft.com/office/powerpoint/2010/main" Requires="p14">
+          <mc:AlternateContent xmlns:mc="http://schemas.openxmlformats.org/markup-compatibility/2006" xmlns:p14="http://schemas.microsoft.com/office/powerpoint/2010/main">
+            <mc:Choice Requires="p14">
               <p:contentPart p14:bwMode="auto" r:id="rId21">
                 <p14:nvContentPartPr>
                   <p14:cNvPr id="23" name="잉크 22">
@@ -10447,7 +11589,7 @@
                 </p14:xfrm>
               </p:contentPart>
             </mc:Choice>
-            <mc:Fallback>
+            <mc:Fallback xmlns="">
               <p:pic>
                 <p:nvPicPr>
                   <p:cNvPr id="23" name="잉크 22">
@@ -10478,8 +11620,8 @@
               </p:pic>
             </mc:Fallback>
           </mc:AlternateContent>
-          <mc:AlternateContent xmlns:mc="http://schemas.openxmlformats.org/markup-compatibility/2006">
-            <mc:Choice xmlns:p14="http://schemas.microsoft.com/office/powerpoint/2010/main" Requires="p14">
+          <mc:AlternateContent xmlns:mc="http://schemas.openxmlformats.org/markup-compatibility/2006" xmlns:p14="http://schemas.microsoft.com/office/powerpoint/2010/main">
+            <mc:Choice Requires="p14">
               <p:contentPart p14:bwMode="auto" r:id="rId22">
                 <p14:nvContentPartPr>
                   <p14:cNvPr id="34" name="잉크 33">
@@ -10498,7 +11640,7 @@
                 </p14:xfrm>
               </p:contentPart>
             </mc:Choice>
-            <mc:Fallback>
+            <mc:Fallback xmlns="">
               <p:pic>
                 <p:nvPicPr>
                   <p:cNvPr id="34" name="잉크 33">
@@ -10529,8 +11671,8 @@
               </p:pic>
             </mc:Fallback>
           </mc:AlternateContent>
-          <mc:AlternateContent xmlns:mc="http://schemas.openxmlformats.org/markup-compatibility/2006">
-            <mc:Choice xmlns:p14="http://schemas.microsoft.com/office/powerpoint/2010/main" Requires="p14">
+          <mc:AlternateContent xmlns:mc="http://schemas.openxmlformats.org/markup-compatibility/2006" xmlns:p14="http://schemas.microsoft.com/office/powerpoint/2010/main">
+            <mc:Choice Requires="p14">
               <p:contentPart p14:bwMode="auto" r:id="rId24">
                 <p14:nvContentPartPr>
                   <p14:cNvPr id="35" name="잉크 34">
@@ -10549,7 +11691,7 @@
                 </p14:xfrm>
               </p:contentPart>
             </mc:Choice>
-            <mc:Fallback>
+            <mc:Fallback xmlns="">
               <p:pic>
                 <p:nvPicPr>
                   <p:cNvPr id="35" name="잉크 34">

--- a/기획/몬스터 기획서_EmotionGame.pptx
+++ b/기획/몬스터 기획서_EmotionGame.pptx
@@ -406,7 +406,7 @@
           <a:p>
             <a:fld id="{90ADBB8C-8191-4AEC-B0E4-021A6DCC5E88}" type="datetimeFigureOut">
               <a:rPr lang="ko-KR" altLang="en-US" smtClean="0"/>
-              <a:t>2026-04-04</a:t>
+              <a:t>2026-05-02</a:t>
             </a:fld>
             <a:endParaRPr lang="ko-KR" altLang="en-US"/>
           </a:p>
@@ -868,33 +868,6 @@
           <inkml:channelProperty channel="F" name="resolution" value="0" units="1/dev"/>
         </inkml:channelProperties>
       </inkml:inkSource>
-      <inkml:timestamp xml:id="ts0" timeString="2026-04-04T05:44:36.062"/>
-    </inkml:context>
-    <inkml:brush xml:id="br0">
-      <inkml:brushProperty name="width" value="0.05" units="cm"/>
-      <inkml:brushProperty name="height" value="0.05" units="cm"/>
-    </inkml:brush>
-  </inkml:definitions>
-  <inkml:trace contextRef="#ctx0" brushRef="#br0">811 1678 24575,'-75'2'0,"-84"-4"0,141-1 0,0 0 0,0-1 0,1 0 0,-1-2 0,1 0 0,1-1 0,-1-1 0,-17-11 0,7-3 0,1-1 0,1-1 0,1-1 0,-37-54 0,48 60 0,2 0 0,0-1 0,-12-35 0,13 31 0,-1 1 0,-18-30 0,10 17 0,2-1 0,1-1 0,1 0 0,-16-74 0,27 93 0,1 0 0,-1-30 0,-6-34 0,5 48 0,0-1 0,3 1 0,1-1 0,7-67 0,-5 92 0,1 1 0,0 0 0,0 0 0,2 0 0,-1 0 0,1 0 0,0 1 0,1-1 0,0 1 0,1 0 0,0 1 0,0 0 0,1-1 0,14-12 0,75-74 0,-31 40 0,104-68 0,-162 118 0,10-5 0,-1 0 0,1 1 0,1 1 0,-1 1 0,29-8 0,11-13 0,-15 7 0,-27 16 0,0 2 0,0 0 0,1 1 0,-1 0 0,1 2 0,-1-1 0,30 5 0,5-2 0,-38 0 0,1 0 0,-1 0 0,0 2 0,0-1 0,0 1 0,-1 1 0,1 0 0,-1 1 0,0 0 0,-1 1 0,1 0 0,11 11 0,57 32 0,38 23 0,-108-67 0,0-1 0,0 2 0,0-1 0,-1 1 0,0 1 0,0 0 0,-1 0 0,0 0 0,0 1 0,-1 0 0,5 9 0,21 27 0,-20-28 0,0 1 0,-2 0 0,0 0 0,-1 1 0,-1 1 0,9 31 0,3 8 0,-2-15 0,-12-33 0,-1 0 0,-1 0 0,0 1 0,0 0 0,-1 0 0,-1 0 0,0 0 0,0 13 0,-3 336 0,1-355 0,-1 0 0,0 0 0,0-1 0,0 1 0,0 0 0,-1 0 0,0-1 0,0 1 0,0-1 0,-1 0 0,0 0 0,0 0 0,0 0 0,-1 0 0,-5 6 0,1-1 0,-15 31 0,19-33 0,-1 1 0,1-1 0,-1 0 0,-9 10 0,2-4 0,1 1 0,-14 26 0,17-27 0,-1-1 0,0 1 0,-1-1 0,-11 12 0,-88 66 0,102-86 0,-74 62-1365,71-59-5461</inkml:trace>
-</inkml:ink>
-</file>
-
-<file path=ppt/ink/ink22.xml><?xml version="1.0" encoding="utf-8"?>
-<inkml:ink xmlns:inkml="http://www.w3.org/2003/InkML">
-  <inkml:definitions>
-    <inkml:context xml:id="ctx0">
-      <inkml:inkSource xml:id="inkSrc0">
-        <inkml:traceFormat>
-          <inkml:channel name="X" type="integer" min="-2.14748E9" max="2.14748E9" units="cm"/>
-          <inkml:channel name="Y" type="integer" min="-2.14748E9" max="2.14748E9" units="cm"/>
-          <inkml:channel name="F" type="integer" max="32767" units="dev"/>
-        </inkml:traceFormat>
-        <inkml:channelProperties>
-          <inkml:channelProperty channel="X" name="resolution" value="1000" units="1/cm"/>
-          <inkml:channelProperty channel="Y" name="resolution" value="1000" units="1/cm"/>
-          <inkml:channelProperty channel="F" name="resolution" value="0" units="1/dev"/>
-        </inkml:channelProperties>
-      </inkml:inkSource>
       <inkml:timestamp xml:id="ts0" timeString="2026-04-04T05:44:36.859"/>
     </inkml:context>
     <inkml:brush xml:id="br0">
@@ -906,7 +879,7 @@
 </inkml:ink>
 </file>
 
-<file path=ppt/ink/ink23.xml><?xml version="1.0" encoding="utf-8"?>
+<file path=ppt/ink/ink22.xml><?xml version="1.0" encoding="utf-8"?>
 <inkml:ink xmlns:inkml="http://www.w3.org/2003/InkML">
   <inkml:definitions>
     <inkml:context xml:id="ctx0">
@@ -933,7 +906,7 @@
 </inkml:ink>
 </file>
 
-<file path=ppt/ink/ink24.xml><?xml version="1.0" encoding="utf-8"?>
+<file path=ppt/ink/ink23.xml><?xml version="1.0" encoding="utf-8"?>
 <inkml:ink xmlns:inkml="http://www.w3.org/2003/InkML">
   <inkml:definitions>
     <inkml:context xml:id="ctx0">
@@ -957,33 +930,6 @@
     </inkml:brush>
   </inkml:definitions>
   <inkml:trace contextRef="#ctx0" brushRef="#br0">0 227 24575,'4'-2'0,"-1"-1"0,1 1 0,-1-1 0,0 0 0,0 0 0,0 0 0,-1 0 0,1-1 0,-1 1 0,0-1 0,2-3 0,8-9 0,67-56 0,-71 64 0,2 0 0,-1 1 0,1 0 0,0 0 0,0 1 0,1 1 0,0-1 0,0 2 0,0-1 0,1 2 0,15-4 0,5-4 0,-25 8 0,0 0 0,0 1 0,0 0 0,0 0 0,10 0 0,-14 2 0,1 0 0,-1 0 0,0 1 0,0-1 0,0 1 0,0 0 0,0 0 0,0 0 0,0 0 0,0 0 0,0 1 0,0-1 0,-1 1 0,1 0 0,-1 0 0,4 3 0,33 23 0,-31-23 0,1 1 0,-1 0 0,0 0 0,13 14 0,-15-14-227,0 0-1,0 0 1,1-1-1,0 0 1,8 4-1,-4-3-6598</inkml:trace>
-</inkml:ink>
-</file>
-
-<file path=ppt/ink/ink25.xml><?xml version="1.0" encoding="utf-8"?>
-<inkml:ink xmlns:inkml="http://www.w3.org/2003/InkML">
-  <inkml:definitions>
-    <inkml:context xml:id="ctx0">
-      <inkml:inkSource xml:id="inkSrc0">
-        <inkml:traceFormat>
-          <inkml:channel name="X" type="integer" min="-2.14748E9" max="2.14748E9" units="cm"/>
-          <inkml:channel name="Y" type="integer" min="-2.14748E9" max="2.14748E9" units="cm"/>
-          <inkml:channel name="F" type="integer" max="32767" units="dev"/>
-        </inkml:traceFormat>
-        <inkml:channelProperties>
-          <inkml:channelProperty channel="X" name="resolution" value="1000" units="1/cm"/>
-          <inkml:channelProperty channel="Y" name="resolution" value="1000" units="1/cm"/>
-          <inkml:channelProperty channel="F" name="resolution" value="0" units="1/dev"/>
-        </inkml:channelProperties>
-      </inkml:inkSource>
-      <inkml:timestamp xml:id="ts0" timeString="2026-04-04T05:44:49.531"/>
-    </inkml:context>
-    <inkml:brush xml:id="br0">
-      <inkml:brushProperty name="width" value="0.05" units="cm"/>
-      <inkml:brushProperty name="height" value="0.05" units="cm"/>
-    </inkml:brush>
-  </inkml:definitions>
-  <inkml:trace contextRef="#ctx0" brushRef="#br0">0 0 24575,'2'4'0,"-1"0"0,1-1 0,0 1 0,-1-1 0,2 1 0,-1-1 0,0 1 0,1-1 0,-1 0 0,1 0 0,0-1 0,0 1 0,0 0 0,5 2 0,14 16 0,-1 4-52,42 39 0,-35-37-1209,-20-18-5565</inkml:trace>
 </inkml:ink>
 </file>
 
@@ -1258,7 +1204,7 @@
           <a:p>
             <a:fld id="{9A139F74-74AF-4C37-AE84-1000E0D0E51D}" type="datetimeFigureOut">
               <a:rPr lang="ko-KR" altLang="en-US" smtClean="0"/>
-              <a:t>2026-04-04</a:t>
+              <a:t>2026-05-02</a:t>
             </a:fld>
             <a:endParaRPr lang="ko-KR" altLang="en-US"/>
           </a:p>
@@ -1672,7 +1618,7 @@
           <a:p>
             <a:fld id="{FBFF74CB-B97E-448A-8613-336F71D317F5}" type="datetime1">
               <a:rPr lang="ko-KR" altLang="en-US" smtClean="0"/>
-              <a:t>2026-04-04</a:t>
+              <a:t>2026-05-02</a:t>
             </a:fld>
             <a:endParaRPr lang="ko-KR" altLang="en-US"/>
           </a:p>
@@ -1960,7 +1906,7 @@
           <a:p>
             <a:fld id="{6D5A3F2E-880D-4AB2-BE87-1DABB4D9D36B}" type="datetime1">
               <a:rPr lang="ko-KR" altLang="en-US" smtClean="0"/>
-              <a:t>2026-04-04</a:t>
+              <a:t>2026-05-02</a:t>
             </a:fld>
             <a:endParaRPr lang="ko-KR" altLang="en-US"/>
           </a:p>
@@ -2158,7 +2104,7 @@
           <a:p>
             <a:fld id="{E225792B-2F2C-46B3-9536-A6BE584A3133}" type="datetime1">
               <a:rPr lang="ko-KR" altLang="en-US" smtClean="0"/>
-              <a:t>2026-04-04</a:t>
+              <a:t>2026-05-02</a:t>
             </a:fld>
             <a:endParaRPr lang="ko-KR" altLang="en-US"/>
           </a:p>
@@ -2366,7 +2312,7 @@
           <a:p>
             <a:fld id="{B959B1C4-1FB0-4ED1-88EC-81D9419D81DC}" type="datetime1">
               <a:rPr lang="ko-KR" altLang="en-US" smtClean="0"/>
-              <a:t>2026-04-04</a:t>
+              <a:t>2026-05-02</a:t>
             </a:fld>
             <a:endParaRPr lang="ko-KR" altLang="en-US"/>
           </a:p>
@@ -2635,7 +2581,7 @@
           <a:p>
             <a:fld id="{644DB65B-E6AE-4B39-8D08-8DC3DC9B3DE6}" type="datetime1">
               <a:rPr lang="ko-KR" altLang="en-US" smtClean="0"/>
-              <a:t>2026-04-04</a:t>
+              <a:t>2026-05-02</a:t>
             </a:fld>
             <a:endParaRPr lang="ko-KR" altLang="en-US"/>
           </a:p>
@@ -2904,7 +2850,7 @@
           <a:p>
             <a:fld id="{644DB65B-E6AE-4B39-8D08-8DC3DC9B3DE6}" type="datetime1">
               <a:rPr lang="ko-KR" altLang="en-US" smtClean="0"/>
-              <a:t>2026-04-04</a:t>
+              <a:t>2026-05-02</a:t>
             </a:fld>
             <a:endParaRPr lang="ko-KR" altLang="en-US"/>
           </a:p>
@@ -3216,7 +3162,7 @@
           <a:p>
             <a:fld id="{A80E6DAD-F59F-4DF2-B36E-B1403061A098}" type="datetime1">
               <a:rPr lang="ko-KR" altLang="en-US" smtClean="0"/>
-              <a:t>2026-04-04</a:t>
+              <a:t>2026-05-02</a:t>
             </a:fld>
             <a:endParaRPr lang="ko-KR" altLang="en-US"/>
           </a:p>
@@ -3481,7 +3427,7 @@
           <a:p>
             <a:fld id="{65E7A435-D09E-4012-8A5A-CB367CE86DE7}" type="datetime1">
               <a:rPr lang="ko-KR" altLang="en-US" smtClean="0"/>
-              <a:t>2026-04-04</a:t>
+              <a:t>2026-05-02</a:t>
             </a:fld>
             <a:endParaRPr lang="ko-KR" altLang="en-US"/>
           </a:p>
@@ -3893,7 +3839,7 @@
           <a:p>
             <a:fld id="{EAEE4FE5-8155-4A7B-B9F1-1277B556A678}" type="datetime1">
               <a:rPr lang="ko-KR" altLang="en-US" smtClean="0"/>
-              <a:t>2026-04-04</a:t>
+              <a:t>2026-05-02</a:t>
             </a:fld>
             <a:endParaRPr lang="ko-KR" altLang="en-US"/>
           </a:p>
@@ -4034,7 +3980,7 @@
           <a:p>
             <a:fld id="{A5DDFFB1-F462-49A1-A952-F86898531EFC}" type="datetime1">
               <a:rPr lang="ko-KR" altLang="en-US" smtClean="0"/>
-              <a:t>2026-04-04</a:t>
+              <a:t>2026-05-02</a:t>
             </a:fld>
             <a:endParaRPr lang="ko-KR" altLang="en-US"/>
           </a:p>
@@ -4147,7 +4093,7 @@
           <a:p>
             <a:fld id="{DF307744-A7EE-42A9-B4BD-A75049B592B9}" type="datetime1">
               <a:rPr lang="ko-KR" altLang="en-US" smtClean="0"/>
-              <a:t>2026-04-04</a:t>
+              <a:t>2026-05-02</a:t>
             </a:fld>
             <a:endParaRPr lang="ko-KR" altLang="en-US"/>
           </a:p>
@@ -4458,7 +4404,7 @@
           <a:p>
             <a:fld id="{DEB58597-5F16-46FB-9810-19206F29ADC7}" type="datetime1">
               <a:rPr lang="ko-KR" altLang="en-US" smtClean="0"/>
-              <a:t>2026-04-04</a:t>
+              <a:t>2026-05-02</a:t>
             </a:fld>
             <a:endParaRPr lang="ko-KR" altLang="en-US"/>
           </a:p>
@@ -4699,7 +4645,7 @@
           <a:p>
             <a:fld id="{F9163AAC-BAFF-4F5F-9CEA-0445F100C3E2}" type="datetime1">
               <a:rPr lang="ko-KR" altLang="en-US" smtClean="0"/>
-              <a:t>2026-04-04</a:t>
+              <a:t>2026-05-02</a:t>
             </a:fld>
             <a:endParaRPr lang="ko-KR" altLang="en-US"/>
           </a:p>
@@ -9014,8 +8960,8 @@
             <a:chExt cx="119520" cy="166320"/>
           </a:xfrm>
         </p:grpSpPr>
-        <mc:AlternateContent xmlns:mc="http://schemas.openxmlformats.org/markup-compatibility/2006">
-          <mc:Choice xmlns:p14="http://schemas.microsoft.com/office/powerpoint/2010/main" Requires="p14">
+        <mc:AlternateContent xmlns:mc="http://schemas.openxmlformats.org/markup-compatibility/2006" xmlns:p14="http://schemas.microsoft.com/office/powerpoint/2010/main">
+          <mc:Choice Requires="p14">
             <p:contentPart p14:bwMode="auto" r:id="rId2">
               <p14:nvContentPartPr>
                 <p14:cNvPr id="20" name="잉크 19">
@@ -9034,7 +8980,7 @@
               </p14:xfrm>
             </p:contentPart>
           </mc:Choice>
-          <mc:Fallback>
+          <mc:Fallback xmlns="">
             <p:pic>
               <p:nvPicPr>
                 <p:cNvPr id="20" name="잉크 19">
@@ -9065,8 +9011,8 @@
             </p:pic>
           </mc:Fallback>
         </mc:AlternateContent>
-        <mc:AlternateContent xmlns:mc="http://schemas.openxmlformats.org/markup-compatibility/2006">
-          <mc:Choice xmlns:p14="http://schemas.microsoft.com/office/powerpoint/2010/main" Requires="p14">
+        <mc:AlternateContent xmlns:mc="http://schemas.openxmlformats.org/markup-compatibility/2006" xmlns:p14="http://schemas.microsoft.com/office/powerpoint/2010/main">
+          <mc:Choice Requires="p14">
             <p:contentPart p14:bwMode="auto" r:id="rId4">
               <p14:nvContentPartPr>
                 <p14:cNvPr id="21" name="잉크 20">
@@ -9085,7 +9031,7 @@
               </p14:xfrm>
             </p:contentPart>
           </mc:Choice>
-          <mc:Fallback>
+          <mc:Fallback xmlns="">
             <p:pic>
               <p:nvPicPr>
                 <p:cNvPr id="21" name="잉크 20">
@@ -9345,8 +9291,8 @@
             </p:txBody>
           </p:sp>
         </p:grpSp>
-        <mc:AlternateContent xmlns:mc="http://schemas.openxmlformats.org/markup-compatibility/2006">
-          <mc:Choice xmlns:p14="http://schemas.microsoft.com/office/powerpoint/2010/main" Requires="p14">
+        <mc:AlternateContent xmlns:mc="http://schemas.openxmlformats.org/markup-compatibility/2006" xmlns:p14="http://schemas.microsoft.com/office/powerpoint/2010/main">
+          <mc:Choice Requires="p14">
             <p:contentPart p14:bwMode="auto" r:id="rId6">
               <p14:nvContentPartPr>
                 <p14:cNvPr id="15" name="잉크 14">
@@ -9365,7 +9311,7 @@
               </p14:xfrm>
             </p:contentPart>
           </mc:Choice>
-          <mc:Fallback>
+          <mc:Fallback xmlns="">
             <p:pic>
               <p:nvPicPr>
                 <p:cNvPr id="15" name="잉크 14">
@@ -9416,8 +9362,8 @@
               <a:chExt cx="762120" cy="2538720"/>
             </a:xfrm>
           </p:grpSpPr>
-          <mc:AlternateContent xmlns:mc="http://schemas.openxmlformats.org/markup-compatibility/2006">
-            <mc:Choice xmlns:p14="http://schemas.microsoft.com/office/powerpoint/2010/main" Requires="p14">
+          <mc:AlternateContent xmlns:mc="http://schemas.openxmlformats.org/markup-compatibility/2006" xmlns:p14="http://schemas.microsoft.com/office/powerpoint/2010/main">
+            <mc:Choice Requires="p14">
               <p:contentPart p14:bwMode="auto" r:id="rId8">
                 <p14:nvContentPartPr>
                   <p14:cNvPr id="23" name="잉크 22">
@@ -9436,7 +9382,7 @@
                 </p14:xfrm>
               </p:contentPart>
             </mc:Choice>
-            <mc:Fallback>
+            <mc:Fallback xmlns="">
               <p:pic>
                 <p:nvPicPr>
                   <p:cNvPr id="23" name="잉크 22">
@@ -9467,8 +9413,8 @@
               </p:pic>
             </mc:Fallback>
           </mc:AlternateContent>
-          <mc:AlternateContent xmlns:mc="http://schemas.openxmlformats.org/markup-compatibility/2006">
-            <mc:Choice xmlns:p14="http://schemas.microsoft.com/office/powerpoint/2010/main" Requires="p14">
+          <mc:AlternateContent xmlns:mc="http://schemas.openxmlformats.org/markup-compatibility/2006" xmlns:p14="http://schemas.microsoft.com/office/powerpoint/2010/main">
+            <mc:Choice Requires="p14">
               <p:contentPart p14:bwMode="auto" r:id="rId10">
                 <p14:nvContentPartPr>
                   <p14:cNvPr id="24" name="잉크 23">
@@ -9487,7 +9433,7 @@
                 </p14:xfrm>
               </p:contentPart>
             </mc:Choice>
-            <mc:Fallback>
+            <mc:Fallback xmlns="">
               <p:pic>
                 <p:nvPicPr>
                   <p:cNvPr id="24" name="잉크 23">
@@ -9518,8 +9464,8 @@
               </p:pic>
             </mc:Fallback>
           </mc:AlternateContent>
-          <mc:AlternateContent xmlns:mc="http://schemas.openxmlformats.org/markup-compatibility/2006">
-            <mc:Choice xmlns:p14="http://schemas.microsoft.com/office/powerpoint/2010/main" Requires="p14">
+          <mc:AlternateContent xmlns:mc="http://schemas.openxmlformats.org/markup-compatibility/2006" xmlns:p14="http://schemas.microsoft.com/office/powerpoint/2010/main">
+            <mc:Choice Requires="p14">
               <p:contentPart p14:bwMode="auto" r:id="rId12">
                 <p14:nvContentPartPr>
                   <p14:cNvPr id="25" name="잉크 24">
@@ -9538,7 +9484,7 @@
                 </p14:xfrm>
               </p:contentPart>
             </mc:Choice>
-            <mc:Fallback>
+            <mc:Fallback xmlns="">
               <p:pic>
                 <p:nvPicPr>
                   <p:cNvPr id="25" name="잉크 24">
@@ -9590,8 +9536,8 @@
               <a:chExt cx="469440" cy="318240"/>
             </a:xfrm>
           </p:grpSpPr>
-          <mc:AlternateContent xmlns:mc="http://schemas.openxmlformats.org/markup-compatibility/2006">
-            <mc:Choice xmlns:p14="http://schemas.microsoft.com/office/powerpoint/2010/main" Requires="p14">
+          <mc:AlternateContent xmlns:mc="http://schemas.openxmlformats.org/markup-compatibility/2006" xmlns:p14="http://schemas.microsoft.com/office/powerpoint/2010/main">
+            <mc:Choice Requires="p14">
               <p:contentPart p14:bwMode="auto" r:id="rId14">
                 <p14:nvContentPartPr>
                   <p14:cNvPr id="27" name="잉크 26">
@@ -9610,7 +9556,7 @@
                 </p14:xfrm>
               </p:contentPart>
             </mc:Choice>
-            <mc:Fallback>
+            <mc:Fallback xmlns="">
               <p:pic>
                 <p:nvPicPr>
                   <p:cNvPr id="27" name="잉크 26">
@@ -9641,8 +9587,8 @@
               </p:pic>
             </mc:Fallback>
           </mc:AlternateContent>
-          <mc:AlternateContent xmlns:mc="http://schemas.openxmlformats.org/markup-compatibility/2006">
-            <mc:Choice xmlns:p14="http://schemas.microsoft.com/office/powerpoint/2010/main" Requires="p14">
+          <mc:AlternateContent xmlns:mc="http://schemas.openxmlformats.org/markup-compatibility/2006" xmlns:p14="http://schemas.microsoft.com/office/powerpoint/2010/main">
+            <mc:Choice Requires="p14">
               <p:contentPart p14:bwMode="auto" r:id="rId16">
                 <p14:nvContentPartPr>
                   <p14:cNvPr id="28" name="잉크 27">
@@ -9661,7 +9607,7 @@
                 </p14:xfrm>
               </p:contentPart>
             </mc:Choice>
-            <mc:Fallback>
+            <mc:Fallback xmlns="">
               <p:pic>
                 <p:nvPicPr>
                   <p:cNvPr id="28" name="잉크 27">
@@ -9692,8 +9638,8 @@
               </p:pic>
             </mc:Fallback>
           </mc:AlternateContent>
-          <mc:AlternateContent xmlns:mc="http://schemas.openxmlformats.org/markup-compatibility/2006">
-            <mc:Choice xmlns:p14="http://schemas.microsoft.com/office/powerpoint/2010/main" Requires="p14">
+          <mc:AlternateContent xmlns:mc="http://schemas.openxmlformats.org/markup-compatibility/2006" xmlns:p14="http://schemas.microsoft.com/office/powerpoint/2010/main">
+            <mc:Choice Requires="p14">
               <p:contentPart p14:bwMode="auto" r:id="rId18">
                 <p14:nvContentPartPr>
                   <p14:cNvPr id="30" name="잉크 29">
@@ -9712,7 +9658,7 @@
                 </p14:xfrm>
               </p:contentPart>
             </mc:Choice>
-            <mc:Fallback>
+            <mc:Fallback xmlns="">
               <p:pic>
                 <p:nvPicPr>
                   <p:cNvPr id="30" name="잉크 29">
@@ -9765,8 +9711,8 @@
             <a:chExt cx="499680" cy="821520"/>
           </a:xfrm>
         </p:grpSpPr>
-        <mc:AlternateContent xmlns:mc="http://schemas.openxmlformats.org/markup-compatibility/2006">
-          <mc:Choice xmlns:p14="http://schemas.microsoft.com/office/powerpoint/2010/main" Requires="p14">
+        <mc:AlternateContent xmlns:mc="http://schemas.openxmlformats.org/markup-compatibility/2006" xmlns:p14="http://schemas.microsoft.com/office/powerpoint/2010/main">
+          <mc:Choice Requires="p14">
             <p:contentPart p14:bwMode="auto" r:id="rId20">
               <p14:nvContentPartPr>
                 <p14:cNvPr id="32" name="잉크 31">
@@ -9785,7 +9731,7 @@
               </p14:xfrm>
             </p:contentPart>
           </mc:Choice>
-          <mc:Fallback>
+          <mc:Fallback xmlns="">
             <p:pic>
               <p:nvPicPr>
                 <p:cNvPr id="32" name="잉크 31">
@@ -9816,8 +9762,8 @@
             </p:pic>
           </mc:Fallback>
         </mc:AlternateContent>
-        <mc:AlternateContent xmlns:mc="http://schemas.openxmlformats.org/markup-compatibility/2006">
-          <mc:Choice xmlns:p14="http://schemas.microsoft.com/office/powerpoint/2010/main" Requires="p14">
+        <mc:AlternateContent xmlns:mc="http://schemas.openxmlformats.org/markup-compatibility/2006" xmlns:p14="http://schemas.microsoft.com/office/powerpoint/2010/main">
+          <mc:Choice Requires="p14">
             <p:contentPart p14:bwMode="auto" r:id="rId22">
               <p14:nvContentPartPr>
                 <p14:cNvPr id="33" name="잉크 32">
@@ -9836,7 +9782,7 @@
               </p14:xfrm>
             </p:contentPart>
           </mc:Choice>
-          <mc:Fallback>
+          <mc:Fallback xmlns="">
             <p:pic>
               <p:nvPicPr>
                 <p:cNvPr id="33" name="잉크 32">
@@ -10846,9 +10792,9 @@
         <p:grpSpPr>
           <a:xfrm>
             <a:off x="7641600" y="4381904"/>
-            <a:ext cx="4223160" cy="2356938"/>
+            <a:ext cx="4095000" cy="2356938"/>
             <a:chOff x="7641600" y="4381904"/>
-            <a:chExt cx="4223160" cy="2356938"/>
+            <a:chExt cx="4095000" cy="2356938"/>
           </a:xfrm>
         </p:grpSpPr>
         <p:grpSp>
@@ -11410,10 +11356,10 @@
           </p:nvGrpSpPr>
           <p:grpSpPr>
             <a:xfrm>
-              <a:off x="11328720" y="5514660"/>
-              <a:ext cx="536040" cy="604800"/>
-              <a:chOff x="11328720" y="5514660"/>
-              <a:chExt cx="536040" cy="604800"/>
+              <a:off x="11536440" y="5669100"/>
+              <a:ext cx="200160" cy="304920"/>
+              <a:chOff x="11536440" y="5669100"/>
+              <a:chExt cx="200160" cy="304920"/>
             </a:xfrm>
           </p:grpSpPr>
           <mc:AlternateContent xmlns:mc="http://schemas.openxmlformats.org/markup-compatibility/2006" xmlns:p14="http://schemas.microsoft.com/office/powerpoint/2010/main">
@@ -11471,57 +11417,6 @@
             <mc:Choice Requires="p14">
               <p:contentPart p14:bwMode="auto" r:id="rId18">
                 <p14:nvContentPartPr>
-                  <p14:cNvPr id="21" name="잉크 20">
-                    <a:extLst>
-                      <a:ext uri="{FF2B5EF4-FFF2-40B4-BE49-F238E27FC236}">
-                        <a16:creationId xmlns:a16="http://schemas.microsoft.com/office/drawing/2014/main" id="{01300938-AEB7-A34A-FD79-6F82D20F6D46}"/>
-                      </a:ext>
-                    </a:extLst>
-                  </p14:cNvPr>
-                  <p14:cNvContentPartPr/>
-                  <p14:nvPr/>
-                </p14:nvContentPartPr>
-                <p14:xfrm>
-                  <a:off x="11328720" y="5514660"/>
-                  <a:ext cx="536040" cy="604800"/>
-                </p14:xfrm>
-              </p:contentPart>
-            </mc:Choice>
-            <mc:Fallback xmlns="">
-              <p:pic>
-                <p:nvPicPr>
-                  <p:cNvPr id="21" name="잉크 20">
-                    <a:extLst>
-                      <a:ext uri="{FF2B5EF4-FFF2-40B4-BE49-F238E27FC236}">
-                        <a16:creationId xmlns:a16="http://schemas.microsoft.com/office/drawing/2014/main" id="{01300938-AEB7-A34A-FD79-6F82D20F6D46}"/>
-                      </a:ext>
-                    </a:extLst>
-                  </p:cNvPr>
-                  <p:cNvPicPr/>
-                  <p:nvPr/>
-                </p:nvPicPr>
-                <p:blipFill>
-                  <a:blip r:embed="rId19"/>
-                  <a:stretch>
-                    <a:fillRect/>
-                  </a:stretch>
-                </p:blipFill>
-                <p:spPr>
-                  <a:xfrm>
-                    <a:off x="11320080" y="5505660"/>
-                    <a:ext cx="553680" cy="622440"/>
-                  </a:xfrm>
-                  <a:prstGeom prst="rect">
-                    <a:avLst/>
-                  </a:prstGeom>
-                </p:spPr>
-              </p:pic>
-            </mc:Fallback>
-          </mc:AlternateContent>
-          <mc:AlternateContent xmlns:mc="http://schemas.openxmlformats.org/markup-compatibility/2006" xmlns:p14="http://schemas.microsoft.com/office/powerpoint/2010/main">
-            <mc:Choice Requires="p14">
-              <p:contentPart p14:bwMode="auto" r:id="rId20">
-                <p14:nvContentPartPr>
                   <p14:cNvPr id="22" name="잉크 21">
                     <a:extLst>
                       <a:ext uri="{FF2B5EF4-FFF2-40B4-BE49-F238E27FC236}">
@@ -11571,7 +11466,7 @@
           </mc:AlternateContent>
           <mc:AlternateContent xmlns:mc="http://schemas.openxmlformats.org/markup-compatibility/2006" xmlns:p14="http://schemas.microsoft.com/office/powerpoint/2010/main">
             <mc:Choice Requires="p14">
-              <p:contentPart p14:bwMode="auto" r:id="rId21">
+              <p:contentPart p14:bwMode="auto" r:id="rId19">
                 <p14:nvContentPartPr>
                   <p14:cNvPr id="23" name="잉크 22">
                     <a:extLst>
@@ -11622,7 +11517,7 @@
           </mc:AlternateContent>
           <mc:AlternateContent xmlns:mc="http://schemas.openxmlformats.org/markup-compatibility/2006" xmlns:p14="http://schemas.microsoft.com/office/powerpoint/2010/main">
             <mc:Choice Requires="p14">
-              <p:contentPart p14:bwMode="auto" r:id="rId22">
+              <p:contentPart p14:bwMode="auto" r:id="rId20">
                 <p14:nvContentPartPr>
                   <p14:cNvPr id="34" name="잉크 33">
                     <a:extLst>
@@ -11671,59 +11566,74 @@
               </p:pic>
             </mc:Fallback>
           </mc:AlternateContent>
-          <mc:AlternateContent xmlns:mc="http://schemas.openxmlformats.org/markup-compatibility/2006" xmlns:p14="http://schemas.microsoft.com/office/powerpoint/2010/main">
-            <mc:Choice Requires="p14">
-              <p:contentPart p14:bwMode="auto" r:id="rId24">
-                <p14:nvContentPartPr>
-                  <p14:cNvPr id="35" name="잉크 34">
-                    <a:extLst>
-                      <a:ext uri="{FF2B5EF4-FFF2-40B4-BE49-F238E27FC236}">
-                        <a16:creationId xmlns:a16="http://schemas.microsoft.com/office/drawing/2014/main" id="{65038BF9-CC2C-1B0E-A1BB-48CD07CA34DF}"/>
-                      </a:ext>
-                    </a:extLst>
-                  </p14:cNvPr>
-                  <p14:cNvContentPartPr/>
-                  <p14:nvPr/>
-                </p14:nvContentPartPr>
-                <p14:xfrm>
-                  <a:off x="11483160" y="5707260"/>
-                  <a:ext cx="65880" cy="71280"/>
-                </p14:xfrm>
-              </p:contentPart>
-            </mc:Choice>
-            <mc:Fallback xmlns="">
-              <p:pic>
-                <p:nvPicPr>
-                  <p:cNvPr id="35" name="잉크 34">
-                    <a:extLst>
-                      <a:ext uri="{FF2B5EF4-FFF2-40B4-BE49-F238E27FC236}">
-                        <a16:creationId xmlns:a16="http://schemas.microsoft.com/office/drawing/2014/main" id="{65038BF9-CC2C-1B0E-A1BB-48CD07CA34DF}"/>
-                      </a:ext>
-                    </a:extLst>
-                  </p:cNvPr>
-                  <p:cNvPicPr/>
-                  <p:nvPr/>
-                </p:nvPicPr>
-                <p:blipFill>
-                  <a:blip r:embed="rId25"/>
-                  <a:stretch>
-                    <a:fillRect/>
-                  </a:stretch>
-                </p:blipFill>
-                <p:spPr>
-                  <a:xfrm>
-                    <a:off x="11474160" y="5698260"/>
-                    <a:ext cx="83520" cy="88920"/>
-                  </a:xfrm>
-                  <a:prstGeom prst="rect">
-                    <a:avLst/>
-                  </a:prstGeom>
-                </p:spPr>
-              </p:pic>
-            </mc:Fallback>
-          </mc:AlternateContent>
         </p:grpSp>
       </p:grpSp>
+      <p:sp>
+        <p:nvSpPr>
+          <p:cNvPr id="6" name="직사각형 5">
+            <a:extLst>
+              <a:ext uri="{FF2B5EF4-FFF2-40B4-BE49-F238E27FC236}">
+                <a16:creationId xmlns:a16="http://schemas.microsoft.com/office/drawing/2014/main" id="{039CECC7-15DB-2611-18D5-648DBA765DCC}"/>
+              </a:ext>
+            </a:extLst>
+          </p:cNvPr>
+          <p:cNvSpPr/>
+          <p:nvPr/>
+        </p:nvSpPr>
+        <p:spPr>
+          <a:xfrm>
+            <a:off x="10179240" y="5462820"/>
+            <a:ext cx="1695820" cy="682605"/>
+          </a:xfrm>
+          <a:prstGeom prst="rect">
+            <a:avLst/>
+          </a:prstGeom>
+          <a:solidFill>
+            <a:schemeClr val="bg1"/>
+          </a:solidFill>
+          <a:ln>
+            <a:solidFill>
+              <a:schemeClr val="bg1"/>
+            </a:solidFill>
+          </a:ln>
+        </p:spPr>
+        <p:style>
+          <a:lnRef idx="2">
+            <a:schemeClr val="accent1">
+              <a:shade val="15000"/>
+            </a:schemeClr>
+          </a:lnRef>
+          <a:fillRef idx="1">
+            <a:schemeClr val="accent1"/>
+          </a:fillRef>
+          <a:effectRef idx="0">
+            <a:schemeClr val="accent1"/>
+          </a:effectRef>
+          <a:fontRef idx="minor">
+            <a:schemeClr val="lt1"/>
+          </a:fontRef>
+        </p:style>
+        <p:txBody>
+          <a:bodyPr rtlCol="0" anchor="ctr"/>
+          <a:lstStyle/>
+          <a:p>
+            <a:pPr algn="ctr"/>
+            <a:r>
+              <a:rPr lang="en-US" altLang="ko-KR" sz="2200" b="1" dirty="0">
+                <a:solidFill>
+                  <a:schemeClr val="tx1"/>
+                </a:solidFill>
+              </a:rPr>
+              <a:t>Sad</a:t>
+            </a:r>
+            <a:endParaRPr lang="ko-KR" altLang="en-US" sz="2200" b="1" dirty="0">
+              <a:solidFill>
+                <a:schemeClr val="tx1"/>
+              </a:solidFill>
+            </a:endParaRPr>
+          </a:p>
+        </p:txBody>
+      </p:sp>
     </p:spTree>
     <p:extLst>
       <p:ext uri="{BB962C8B-B14F-4D97-AF65-F5344CB8AC3E}">

--- a/기획/몬스터 기획서_EmotionGame.pptx
+++ b/기획/몬스터 기획서_EmotionGame.pptx
@@ -406,7 +406,7 @@
           <a:p>
             <a:fld id="{90ADBB8C-8191-4AEC-B0E4-021A6DCC5E88}" type="datetimeFigureOut">
               <a:rPr lang="ko-KR" altLang="en-US" smtClean="0"/>
-              <a:t>2026-05-02</a:t>
+              <a:t>2026-05-18</a:t>
             </a:fld>
             <a:endParaRPr lang="ko-KR" altLang="en-US"/>
           </a:p>
@@ -1204,7 +1204,7 @@
           <a:p>
             <a:fld id="{9A139F74-74AF-4C37-AE84-1000E0D0E51D}" type="datetimeFigureOut">
               <a:rPr lang="ko-KR" altLang="en-US" smtClean="0"/>
-              <a:t>2026-05-02</a:t>
+              <a:t>2026-05-18</a:t>
             </a:fld>
             <a:endParaRPr lang="ko-KR" altLang="en-US"/>
           </a:p>
@@ -1618,7 +1618,7 @@
           <a:p>
             <a:fld id="{FBFF74CB-B97E-448A-8613-336F71D317F5}" type="datetime1">
               <a:rPr lang="ko-KR" altLang="en-US" smtClean="0"/>
-              <a:t>2026-05-02</a:t>
+              <a:t>2026-05-18</a:t>
             </a:fld>
             <a:endParaRPr lang="ko-KR" altLang="en-US"/>
           </a:p>
@@ -1906,7 +1906,7 @@
           <a:p>
             <a:fld id="{6D5A3F2E-880D-4AB2-BE87-1DABB4D9D36B}" type="datetime1">
               <a:rPr lang="ko-KR" altLang="en-US" smtClean="0"/>
-              <a:t>2026-05-02</a:t>
+              <a:t>2026-05-18</a:t>
             </a:fld>
             <a:endParaRPr lang="ko-KR" altLang="en-US"/>
           </a:p>
@@ -2104,7 +2104,7 @@
           <a:p>
             <a:fld id="{E225792B-2F2C-46B3-9536-A6BE584A3133}" type="datetime1">
               <a:rPr lang="ko-KR" altLang="en-US" smtClean="0"/>
-              <a:t>2026-05-02</a:t>
+              <a:t>2026-05-18</a:t>
             </a:fld>
             <a:endParaRPr lang="ko-KR" altLang="en-US"/>
           </a:p>
@@ -2312,7 +2312,7 @@
           <a:p>
             <a:fld id="{B959B1C4-1FB0-4ED1-88EC-81D9419D81DC}" type="datetime1">
               <a:rPr lang="ko-KR" altLang="en-US" smtClean="0"/>
-              <a:t>2026-05-02</a:t>
+              <a:t>2026-05-18</a:t>
             </a:fld>
             <a:endParaRPr lang="ko-KR" altLang="en-US"/>
           </a:p>
@@ -2581,7 +2581,7 @@
           <a:p>
             <a:fld id="{644DB65B-E6AE-4B39-8D08-8DC3DC9B3DE6}" type="datetime1">
               <a:rPr lang="ko-KR" altLang="en-US" smtClean="0"/>
-              <a:t>2026-05-02</a:t>
+              <a:t>2026-05-18</a:t>
             </a:fld>
             <a:endParaRPr lang="ko-KR" altLang="en-US"/>
           </a:p>
@@ -2850,7 +2850,7 @@
           <a:p>
             <a:fld id="{644DB65B-E6AE-4B39-8D08-8DC3DC9B3DE6}" type="datetime1">
               <a:rPr lang="ko-KR" altLang="en-US" smtClean="0"/>
-              <a:t>2026-05-02</a:t>
+              <a:t>2026-05-18</a:t>
             </a:fld>
             <a:endParaRPr lang="ko-KR" altLang="en-US"/>
           </a:p>
@@ -3162,7 +3162,7 @@
           <a:p>
             <a:fld id="{A80E6DAD-F59F-4DF2-B36E-B1403061A098}" type="datetime1">
               <a:rPr lang="ko-KR" altLang="en-US" smtClean="0"/>
-              <a:t>2026-05-02</a:t>
+              <a:t>2026-05-18</a:t>
             </a:fld>
             <a:endParaRPr lang="ko-KR" altLang="en-US"/>
           </a:p>
@@ -3427,7 +3427,7 @@
           <a:p>
             <a:fld id="{65E7A435-D09E-4012-8A5A-CB367CE86DE7}" type="datetime1">
               <a:rPr lang="ko-KR" altLang="en-US" smtClean="0"/>
-              <a:t>2026-05-02</a:t>
+              <a:t>2026-05-18</a:t>
             </a:fld>
             <a:endParaRPr lang="ko-KR" altLang="en-US"/>
           </a:p>
@@ -3839,7 +3839,7 @@
           <a:p>
             <a:fld id="{EAEE4FE5-8155-4A7B-B9F1-1277B556A678}" type="datetime1">
               <a:rPr lang="ko-KR" altLang="en-US" smtClean="0"/>
-              <a:t>2026-05-02</a:t>
+              <a:t>2026-05-18</a:t>
             </a:fld>
             <a:endParaRPr lang="ko-KR" altLang="en-US"/>
           </a:p>
@@ -3980,7 +3980,7 @@
           <a:p>
             <a:fld id="{A5DDFFB1-F462-49A1-A952-F86898531EFC}" type="datetime1">
               <a:rPr lang="ko-KR" altLang="en-US" smtClean="0"/>
-              <a:t>2026-05-02</a:t>
+              <a:t>2026-05-18</a:t>
             </a:fld>
             <a:endParaRPr lang="ko-KR" altLang="en-US"/>
           </a:p>
@@ -4093,7 +4093,7 @@
           <a:p>
             <a:fld id="{DF307744-A7EE-42A9-B4BD-A75049B592B9}" type="datetime1">
               <a:rPr lang="ko-KR" altLang="en-US" smtClean="0"/>
-              <a:t>2026-05-02</a:t>
+              <a:t>2026-05-18</a:t>
             </a:fld>
             <a:endParaRPr lang="ko-KR" altLang="en-US"/>
           </a:p>
@@ -4404,7 +4404,7 @@
           <a:p>
             <a:fld id="{DEB58597-5F16-46FB-9810-19206F29ADC7}" type="datetime1">
               <a:rPr lang="ko-KR" altLang="en-US" smtClean="0"/>
-              <a:t>2026-05-02</a:t>
+              <a:t>2026-05-18</a:t>
             </a:fld>
             <a:endParaRPr lang="ko-KR" altLang="en-US"/>
           </a:p>
@@ -4645,7 +4645,7 @@
           <a:p>
             <a:fld id="{F9163AAC-BAFF-4F5F-9CEA-0445F100C3E2}" type="datetime1">
               <a:rPr lang="ko-KR" altLang="en-US" smtClean="0"/>
-              <a:t>2026-05-02</a:t>
+              <a:t>2026-05-18</a:t>
             </a:fld>
             <a:endParaRPr lang="ko-KR" altLang="en-US"/>
           </a:p>
@@ -7314,14 +7314,14 @@
           <p:nvPr>
             <p:extLst>
               <p:ext uri="{D42A27DB-BD31-4B8C-83A1-F6EECF244321}">
-                <p14:modId xmlns:p14="http://schemas.microsoft.com/office/powerpoint/2010/main" val="1692905259"/>
+                <p14:modId xmlns:p14="http://schemas.microsoft.com/office/powerpoint/2010/main" val="1095263486"/>
               </p:ext>
             </p:extLst>
           </p:nvPr>
         </p:nvGraphicFramePr>
         <p:xfrm>
           <a:off x="8498891" y="119158"/>
-          <a:ext cx="3502609" cy="2438400"/>
+          <a:ext cx="3502609" cy="2743200"/>
         </p:xfrm>
         <a:graphic>
           <a:graphicData uri="http://schemas.openxmlformats.org/drawingml/2006/table">
@@ -7880,7 +7880,7 @@
                             <a:schemeClr val="tx1"/>
                           </a:solidFill>
                         </a:rPr>
-                        <a:t>1</a:t>
+                        <a:t>3</a:t>
                       </a:r>
                       <a:endParaRPr lang="ko-KR" altLang="en-US" sz="1400" b="0" dirty="0">
                         <a:solidFill>
@@ -7934,6 +7934,199 @@
                 <a:extLst>
                   <a:ext uri="{0D108BD9-81ED-4DB2-BD59-A6C34878D82A}">
                     <a16:rowId xmlns:a16="http://schemas.microsoft.com/office/drawing/2014/main" val="2549169645"/>
+                  </a:ext>
+                </a:extLst>
+              </a:tr>
+              <a:tr h="303433">
+                <a:tc>
+                  <a:txBody>
+                    <a:bodyPr/>
+                    <a:lstStyle/>
+                    <a:p>
+                      <a:pPr algn="l" latinLnBrk="0"/>
+                      <a:r>
+                        <a:rPr lang="ko-KR" altLang="en-US" sz="1400" b="1" dirty="0">
+                          <a:solidFill>
+                            <a:schemeClr val="tx1"/>
+                          </a:solidFill>
+                        </a:rPr>
+                        <a:t>파워 레벨</a:t>
+                      </a:r>
+                    </a:p>
+                  </a:txBody>
+                  <a:tcPr anchor="ctr">
+                    <a:lnL w="12700" cap="flat" cmpd="sng" algn="ctr">
+                      <a:solidFill>
+                        <a:schemeClr val="tx1"/>
+                      </a:solidFill>
+                      <a:prstDash val="solid"/>
+                      <a:round/>
+                      <a:headEnd type="none" w="med" len="med"/>
+                      <a:tailEnd type="none" w="med" len="med"/>
+                    </a:lnL>
+                    <a:lnR w="12700" cap="flat" cmpd="sng" algn="ctr">
+                      <a:solidFill>
+                        <a:schemeClr val="tx1"/>
+                      </a:solidFill>
+                      <a:prstDash val="solid"/>
+                      <a:round/>
+                      <a:headEnd type="none" w="med" len="med"/>
+                      <a:tailEnd type="none" w="med" len="med"/>
+                    </a:lnR>
+                    <a:lnT w="12700" cap="flat" cmpd="sng" algn="ctr">
+                      <a:solidFill>
+                        <a:schemeClr val="tx1"/>
+                      </a:solidFill>
+                      <a:prstDash val="solid"/>
+                      <a:round/>
+                      <a:headEnd type="none" w="med" len="med"/>
+                      <a:tailEnd type="none" w="med" len="med"/>
+                    </a:lnT>
+                    <a:lnB w="12700" cap="flat" cmpd="sng" algn="ctr">
+                      <a:solidFill>
+                        <a:schemeClr val="tx1"/>
+                      </a:solidFill>
+                      <a:prstDash val="solid"/>
+                      <a:round/>
+                      <a:headEnd type="none" w="med" len="med"/>
+                      <a:tailEnd type="none" w="med" len="med"/>
+                    </a:lnB>
+                    <a:solidFill>
+                      <a:schemeClr val="bg1">
+                        <a:lumMod val="85000"/>
+                      </a:schemeClr>
+                    </a:solidFill>
+                  </a:tcPr>
+                </a:tc>
+                <a:tc>
+                  <a:txBody>
+                    <a:bodyPr/>
+                    <a:lstStyle/>
+                    <a:p>
+                      <a:pPr algn="ctr" latinLnBrk="0"/>
+                      <a:r>
+                        <a:rPr lang="en-US" altLang="ko-KR" sz="1400" b="0" dirty="0">
+                          <a:solidFill>
+                            <a:schemeClr val="tx1"/>
+                          </a:solidFill>
+                        </a:rPr>
+                        <a:t>int</a:t>
+                      </a:r>
+                      <a:endParaRPr lang="ko-KR" altLang="en-US" sz="1400" b="0" dirty="0">
+                        <a:solidFill>
+                          <a:schemeClr val="tx1"/>
+                        </a:solidFill>
+                      </a:endParaRPr>
+                    </a:p>
+                  </a:txBody>
+                  <a:tcPr anchor="ctr">
+                    <a:lnL w="12700" cap="flat" cmpd="sng" algn="ctr">
+                      <a:solidFill>
+                        <a:schemeClr val="tx1"/>
+                      </a:solidFill>
+                      <a:prstDash val="solid"/>
+                      <a:round/>
+                      <a:headEnd type="none" w="med" len="med"/>
+                      <a:tailEnd type="none" w="med" len="med"/>
+                    </a:lnL>
+                    <a:lnR w="12700" cap="flat" cmpd="sng" algn="ctr">
+                      <a:solidFill>
+                        <a:schemeClr val="tx1"/>
+                      </a:solidFill>
+                      <a:prstDash val="solid"/>
+                      <a:round/>
+                      <a:headEnd type="none" w="med" len="med"/>
+                      <a:tailEnd type="none" w="med" len="med"/>
+                    </a:lnR>
+                    <a:lnT w="12700" cap="flat" cmpd="sng" algn="ctr">
+                      <a:solidFill>
+                        <a:schemeClr val="tx1"/>
+                      </a:solidFill>
+                      <a:prstDash val="solid"/>
+                      <a:round/>
+                      <a:headEnd type="none" w="med" len="med"/>
+                      <a:tailEnd type="none" w="med" len="med"/>
+                    </a:lnT>
+                    <a:lnB w="12700" cap="flat" cmpd="sng" algn="ctr">
+                      <a:solidFill>
+                        <a:schemeClr val="tx1"/>
+                      </a:solidFill>
+                      <a:prstDash val="solid"/>
+                      <a:round/>
+                      <a:headEnd type="none" w="med" len="med"/>
+                      <a:tailEnd type="none" w="med" len="med"/>
+                    </a:lnB>
+                    <a:solidFill>
+                      <a:schemeClr val="bg1"/>
+                    </a:solidFill>
+                  </a:tcPr>
+                </a:tc>
+                <a:tc>
+                  <a:txBody>
+                    <a:bodyPr/>
+                    <a:lstStyle/>
+                    <a:p>
+                      <a:pPr algn="ctr" latinLnBrk="0"/>
+                      <a:r>
+                        <a:rPr lang="en-US" altLang="ko-KR" sz="1400" b="0" dirty="0">
+                          <a:solidFill>
+                            <a:schemeClr val="tx1"/>
+                          </a:solidFill>
+                        </a:rPr>
+                        <a:t>3</a:t>
+                      </a:r>
+                      <a:endParaRPr lang="ko-KR" altLang="en-US" sz="1400" b="0" dirty="0">
+                        <a:solidFill>
+                          <a:schemeClr val="tx1"/>
+                        </a:solidFill>
+                      </a:endParaRPr>
+                    </a:p>
+                  </a:txBody>
+                  <a:tcPr anchor="ctr">
+                    <a:lnL w="12700" cap="flat" cmpd="sng" algn="ctr">
+                      <a:solidFill>
+                        <a:schemeClr val="tx1"/>
+                      </a:solidFill>
+                      <a:prstDash val="solid"/>
+                      <a:round/>
+                      <a:headEnd type="none" w="med" len="med"/>
+                      <a:tailEnd type="none" w="med" len="med"/>
+                    </a:lnL>
+                    <a:lnR w="12700" cap="flat" cmpd="sng" algn="ctr">
+                      <a:solidFill>
+                        <a:schemeClr val="tx1"/>
+                      </a:solidFill>
+                      <a:prstDash val="solid"/>
+                      <a:round/>
+                      <a:headEnd type="none" w="med" len="med"/>
+                      <a:tailEnd type="none" w="med" len="med"/>
+                    </a:lnR>
+                    <a:lnT w="12700" cap="flat" cmpd="sng" algn="ctr">
+                      <a:solidFill>
+                        <a:schemeClr val="tx1"/>
+                      </a:solidFill>
+                      <a:prstDash val="solid"/>
+                      <a:round/>
+                      <a:headEnd type="none" w="med" len="med"/>
+                      <a:tailEnd type="none" w="med" len="med"/>
+                    </a:lnT>
+                    <a:lnB w="12700" cap="flat" cmpd="sng" algn="ctr">
+                      <a:solidFill>
+                        <a:schemeClr val="tx1"/>
+                      </a:solidFill>
+                      <a:prstDash val="solid"/>
+                      <a:round/>
+                      <a:headEnd type="none" w="med" len="med"/>
+                      <a:tailEnd type="none" w="med" len="med"/>
+                    </a:lnB>
+                    <a:solidFill>
+                      <a:schemeClr val="bg1"/>
+                    </a:solidFill>
+                  </a:tcPr>
+                </a:tc>
+                <a:extLst>
+                  <a:ext uri="{0D108BD9-81ED-4DB2-BD59-A6C34878D82A}">
+                    <a16:rowId xmlns:a16="http://schemas.microsoft.com/office/drawing/2014/main" val="3589920612"/>
                   </a:ext>
                 </a:extLst>
               </a:tr>
@@ -9705,14 +9898,14 @@
         </p:nvGrpSpPr>
         <p:grpSpPr>
           <a:xfrm>
-            <a:off x="7951705" y="2104749"/>
+            <a:off x="7951705" y="2400024"/>
             <a:ext cx="499680" cy="821520"/>
             <a:chOff x="7951705" y="2104749"/>
             <a:chExt cx="499680" cy="821520"/>
           </a:xfrm>
         </p:grpSpPr>
-        <mc:AlternateContent xmlns:mc="http://schemas.openxmlformats.org/markup-compatibility/2006" xmlns:p14="http://schemas.microsoft.com/office/powerpoint/2010/main">
-          <mc:Choice Requires="p14">
+        <mc:AlternateContent xmlns:mc="http://schemas.openxmlformats.org/markup-compatibility/2006">
+          <mc:Choice xmlns:p14="http://schemas.microsoft.com/office/powerpoint/2010/main" Requires="p14">
             <p:contentPart p14:bwMode="auto" r:id="rId20">
               <p14:nvContentPartPr>
                 <p14:cNvPr id="32" name="잉크 31">
@@ -9731,7 +9924,7 @@
               </p14:xfrm>
             </p:contentPart>
           </mc:Choice>
-          <mc:Fallback xmlns="">
+          <mc:Fallback>
             <p:pic>
               <p:nvPicPr>
                 <p:cNvPr id="32" name="잉크 31">
@@ -9752,8 +9945,8 @@
               </p:blipFill>
               <p:spPr>
                 <a:xfrm>
-                  <a:off x="8229625" y="2095749"/>
-                  <a:ext cx="230760" cy="336960"/>
+                  <a:off x="8229250" y="2095749"/>
+                  <a:ext cx="230790" cy="336960"/>
                 </a:xfrm>
                 <a:prstGeom prst="rect">
                   <a:avLst/>

--- a/기획/몬스터 기획서_EmotionGame.pptx
+++ b/기획/몬스터 기획서_EmotionGame.pptx
@@ -5,16 +5,17 @@
     <p:sldMasterId id="2147483648" r:id="rId1"/>
   </p:sldMasterIdLst>
   <p:notesMasterIdLst>
-    <p:notesMasterId r:id="rId6"/>
+    <p:notesMasterId r:id="rId7"/>
   </p:notesMasterIdLst>
   <p:handoutMasterIdLst>
-    <p:handoutMasterId r:id="rId7"/>
+    <p:handoutMasterId r:id="rId8"/>
   </p:handoutMasterIdLst>
   <p:sldIdLst>
     <p:sldId id="256" r:id="rId2"/>
-    <p:sldId id="276" r:id="rId3"/>
-    <p:sldId id="283" r:id="rId4"/>
-    <p:sldId id="284" r:id="rId5"/>
+    <p:sldId id="285" r:id="rId3"/>
+    <p:sldId id="276" r:id="rId4"/>
+    <p:sldId id="283" r:id="rId5"/>
+    <p:sldId id="284" r:id="rId6"/>
   </p:sldIdLst>
   <p:sldSz cx="12192000" cy="6858000"/>
   <p:notesSz cx="6858000" cy="9144000"/>
@@ -406,7 +407,7 @@
           <a:p>
             <a:fld id="{90ADBB8C-8191-4AEC-B0E4-021A6DCC5E88}" type="datetimeFigureOut">
               <a:rPr lang="ko-KR" altLang="en-US" smtClean="0"/>
-              <a:t>2026-05-18</a:t>
+              <a:t>2026-05-26</a:t>
             </a:fld>
             <a:endParaRPr lang="ko-KR" altLang="en-US"/>
           </a:p>
@@ -1204,7 +1205,7 @@
           <a:p>
             <a:fld id="{9A139F74-74AF-4C37-AE84-1000E0D0E51D}" type="datetimeFigureOut">
               <a:rPr lang="ko-KR" altLang="en-US" smtClean="0"/>
-              <a:t>2026-05-18</a:t>
+              <a:t>2026-05-26</a:t>
             </a:fld>
             <a:endParaRPr lang="ko-KR" altLang="en-US"/>
           </a:p>
@@ -1618,7 +1619,7 @@
           <a:p>
             <a:fld id="{FBFF74CB-B97E-448A-8613-336F71D317F5}" type="datetime1">
               <a:rPr lang="ko-KR" altLang="en-US" smtClean="0"/>
-              <a:t>2026-05-18</a:t>
+              <a:t>2026-05-26</a:t>
             </a:fld>
             <a:endParaRPr lang="ko-KR" altLang="en-US"/>
           </a:p>
@@ -1906,7 +1907,7 @@
           <a:p>
             <a:fld id="{6D5A3F2E-880D-4AB2-BE87-1DABB4D9D36B}" type="datetime1">
               <a:rPr lang="ko-KR" altLang="en-US" smtClean="0"/>
-              <a:t>2026-05-18</a:t>
+              <a:t>2026-05-26</a:t>
             </a:fld>
             <a:endParaRPr lang="ko-KR" altLang="en-US"/>
           </a:p>
@@ -2104,7 +2105,7 @@
           <a:p>
             <a:fld id="{E225792B-2F2C-46B3-9536-A6BE584A3133}" type="datetime1">
               <a:rPr lang="ko-KR" altLang="en-US" smtClean="0"/>
-              <a:t>2026-05-18</a:t>
+              <a:t>2026-05-26</a:t>
             </a:fld>
             <a:endParaRPr lang="ko-KR" altLang="en-US"/>
           </a:p>
@@ -2312,7 +2313,7 @@
           <a:p>
             <a:fld id="{B959B1C4-1FB0-4ED1-88EC-81D9419D81DC}" type="datetime1">
               <a:rPr lang="ko-KR" altLang="en-US" smtClean="0"/>
-              <a:t>2026-05-18</a:t>
+              <a:t>2026-05-26</a:t>
             </a:fld>
             <a:endParaRPr lang="ko-KR" altLang="en-US"/>
           </a:p>
@@ -2581,7 +2582,7 @@
           <a:p>
             <a:fld id="{644DB65B-E6AE-4B39-8D08-8DC3DC9B3DE6}" type="datetime1">
               <a:rPr lang="ko-KR" altLang="en-US" smtClean="0"/>
-              <a:t>2026-05-18</a:t>
+              <a:t>2026-05-26</a:t>
             </a:fld>
             <a:endParaRPr lang="ko-KR" altLang="en-US"/>
           </a:p>
@@ -2850,7 +2851,7 @@
           <a:p>
             <a:fld id="{644DB65B-E6AE-4B39-8D08-8DC3DC9B3DE6}" type="datetime1">
               <a:rPr lang="ko-KR" altLang="en-US" smtClean="0"/>
-              <a:t>2026-05-18</a:t>
+              <a:t>2026-05-26</a:t>
             </a:fld>
             <a:endParaRPr lang="ko-KR" altLang="en-US"/>
           </a:p>
@@ -3162,7 +3163,7 @@
           <a:p>
             <a:fld id="{A80E6DAD-F59F-4DF2-B36E-B1403061A098}" type="datetime1">
               <a:rPr lang="ko-KR" altLang="en-US" smtClean="0"/>
-              <a:t>2026-05-18</a:t>
+              <a:t>2026-05-26</a:t>
             </a:fld>
             <a:endParaRPr lang="ko-KR" altLang="en-US"/>
           </a:p>
@@ -3427,7 +3428,7 @@
           <a:p>
             <a:fld id="{65E7A435-D09E-4012-8A5A-CB367CE86DE7}" type="datetime1">
               <a:rPr lang="ko-KR" altLang="en-US" smtClean="0"/>
-              <a:t>2026-05-18</a:t>
+              <a:t>2026-05-26</a:t>
             </a:fld>
             <a:endParaRPr lang="ko-KR" altLang="en-US"/>
           </a:p>
@@ -3839,7 +3840,7 @@
           <a:p>
             <a:fld id="{EAEE4FE5-8155-4A7B-B9F1-1277B556A678}" type="datetime1">
               <a:rPr lang="ko-KR" altLang="en-US" smtClean="0"/>
-              <a:t>2026-05-18</a:t>
+              <a:t>2026-05-26</a:t>
             </a:fld>
             <a:endParaRPr lang="ko-KR" altLang="en-US"/>
           </a:p>
@@ -3980,7 +3981,7 @@
           <a:p>
             <a:fld id="{A5DDFFB1-F462-49A1-A952-F86898531EFC}" type="datetime1">
               <a:rPr lang="ko-KR" altLang="en-US" smtClean="0"/>
-              <a:t>2026-05-18</a:t>
+              <a:t>2026-05-26</a:t>
             </a:fld>
             <a:endParaRPr lang="ko-KR" altLang="en-US"/>
           </a:p>
@@ -4093,7 +4094,7 @@
           <a:p>
             <a:fld id="{DF307744-A7EE-42A9-B4BD-A75049B592B9}" type="datetime1">
               <a:rPr lang="ko-KR" altLang="en-US" smtClean="0"/>
-              <a:t>2026-05-18</a:t>
+              <a:t>2026-05-26</a:t>
             </a:fld>
             <a:endParaRPr lang="ko-KR" altLang="en-US"/>
           </a:p>
@@ -4404,7 +4405,7 @@
           <a:p>
             <a:fld id="{DEB58597-5F16-46FB-9810-19206F29ADC7}" type="datetime1">
               <a:rPr lang="ko-KR" altLang="en-US" smtClean="0"/>
-              <a:t>2026-05-18</a:t>
+              <a:t>2026-05-26</a:t>
             </a:fld>
             <a:endParaRPr lang="ko-KR" altLang="en-US"/>
           </a:p>
@@ -4645,7 +4646,7 @@
           <a:p>
             <a:fld id="{F9163AAC-BAFF-4F5F-9CEA-0445F100C3E2}" type="datetime1">
               <a:rPr lang="ko-KR" altLang="en-US" smtClean="0"/>
-              <a:t>2026-05-18</a:t>
+              <a:t>2026-05-26</a:t>
             </a:fld>
             <a:endParaRPr lang="ko-KR" altLang="en-US"/>
           </a:p>
@@ -5216,6 +5217,233 @@
   <p:cSld>
     <p:spTree>
       <p:nvGrpSpPr>
+        <p:cNvPr id="1" name=""/>
+        <p:cNvGrpSpPr/>
+        <p:nvPr/>
+      </p:nvGrpSpPr>
+      <p:grpSpPr>
+        <a:xfrm>
+          <a:off x="0" y="0"/>
+          <a:ext cx="0" cy="0"/>
+          <a:chOff x="0" y="0"/>
+          <a:chExt cx="0" cy="0"/>
+        </a:xfrm>
+      </p:grpSpPr>
+      <p:sp>
+        <p:nvSpPr>
+          <p:cNvPr id="2" name="텍스트 개체 틀 1">
+            <a:extLst>
+              <a:ext uri="{FF2B5EF4-FFF2-40B4-BE49-F238E27FC236}">
+                <a16:creationId xmlns:a16="http://schemas.microsoft.com/office/drawing/2014/main" id="{DBC96A5F-73F4-D480-89FB-631C95AAB3E1}"/>
+              </a:ext>
+            </a:extLst>
+          </p:cNvPr>
+          <p:cNvSpPr>
+            <a:spLocks noGrp="1"/>
+          </p:cNvSpPr>
+          <p:nvPr>
+            <p:ph type="body" sz="quarter" idx="13"/>
+          </p:nvPr>
+        </p:nvSpPr>
+        <p:spPr/>
+        <p:txBody>
+          <a:bodyPr/>
+          <a:lstStyle/>
+          <a:p>
+            <a:endParaRPr lang="ko-KR" altLang="en-US"/>
+          </a:p>
+        </p:txBody>
+      </p:sp>
+      <p:sp>
+        <p:nvSpPr>
+          <p:cNvPr id="3" name="제목 2">
+            <a:extLst>
+              <a:ext uri="{FF2B5EF4-FFF2-40B4-BE49-F238E27FC236}">
+                <a16:creationId xmlns:a16="http://schemas.microsoft.com/office/drawing/2014/main" id="{407CB9B4-EFCE-CBE0-F86A-C7EB37CE6ED9}"/>
+              </a:ext>
+            </a:extLst>
+          </p:cNvPr>
+          <p:cNvSpPr>
+            <a:spLocks noGrp="1"/>
+          </p:cNvSpPr>
+          <p:nvPr>
+            <p:ph type="title"/>
+          </p:nvPr>
+        </p:nvSpPr>
+        <p:spPr>
+          <a:xfrm>
+            <a:off x="0" y="119158"/>
+            <a:ext cx="1600200" cy="978729"/>
+          </a:xfrm>
+        </p:spPr>
+        <p:txBody>
+          <a:bodyPr/>
+          <a:lstStyle/>
+          <a:p>
+            <a:r>
+              <a:rPr lang="ko-KR" altLang="en-US" dirty="0"/>
+              <a:t>몬스터 사이즈</a:t>
+            </a:r>
+          </a:p>
+        </p:txBody>
+      </p:sp>
+      <p:sp>
+        <p:nvSpPr>
+          <p:cNvPr id="4" name="내용 개체 틀 3">
+            <a:extLst>
+              <a:ext uri="{FF2B5EF4-FFF2-40B4-BE49-F238E27FC236}">
+                <a16:creationId xmlns:a16="http://schemas.microsoft.com/office/drawing/2014/main" id="{87DBDFD1-7D99-8A24-6A85-CBCD14E371AA}"/>
+              </a:ext>
+            </a:extLst>
+          </p:cNvPr>
+          <p:cNvSpPr>
+            <a:spLocks noGrp="1"/>
+          </p:cNvSpPr>
+          <p:nvPr>
+            <p:ph idx="1"/>
+          </p:nvPr>
+        </p:nvSpPr>
+        <p:spPr/>
+        <p:txBody>
+          <a:bodyPr/>
+          <a:lstStyle/>
+          <a:p>
+            <a:endParaRPr lang="ko-KR" altLang="en-US" dirty="0"/>
+          </a:p>
+        </p:txBody>
+      </p:sp>
+      <p:sp>
+        <p:nvSpPr>
+          <p:cNvPr id="5" name="슬라이드 번호 개체 틀 4">
+            <a:extLst>
+              <a:ext uri="{FF2B5EF4-FFF2-40B4-BE49-F238E27FC236}">
+                <a16:creationId xmlns:a16="http://schemas.microsoft.com/office/drawing/2014/main" id="{475E6F8C-9963-2940-9E32-EF505302C906}"/>
+              </a:ext>
+            </a:extLst>
+          </p:cNvPr>
+          <p:cNvSpPr>
+            <a:spLocks noGrp="1"/>
+          </p:cNvSpPr>
+          <p:nvPr>
+            <p:ph type="sldNum" sz="quarter" idx="12"/>
+          </p:nvPr>
+        </p:nvSpPr>
+        <p:spPr/>
+        <p:txBody>
+          <a:bodyPr/>
+          <a:lstStyle/>
+          <a:p>
+            <a:fld id="{2A226FEB-661D-4181-84CB-C53DCFE1931A}" type="slidenum">
+              <a:rPr lang="ko-KR" altLang="en-US" smtClean="0"/>
+              <a:t>2</a:t>
+            </a:fld>
+            <a:endParaRPr lang="ko-KR" altLang="en-US"/>
+          </a:p>
+        </p:txBody>
+      </p:sp>
+      <p:pic>
+        <p:nvPicPr>
+          <p:cNvPr id="7" name="그림 6">
+            <a:extLst>
+              <a:ext uri="{FF2B5EF4-FFF2-40B4-BE49-F238E27FC236}">
+                <a16:creationId xmlns:a16="http://schemas.microsoft.com/office/drawing/2014/main" id="{E2ADC950-4FA8-4F3D-CB7F-2CFBBDDDA780}"/>
+              </a:ext>
+            </a:extLst>
+          </p:cNvPr>
+          <p:cNvPicPr>
+            <a:picLocks noChangeAspect="1"/>
+          </p:cNvPicPr>
+          <p:nvPr/>
+        </p:nvPicPr>
+        <p:blipFill>
+          <a:blip r:embed="rId2"/>
+          <a:stretch>
+            <a:fillRect/>
+          </a:stretch>
+        </p:blipFill>
+        <p:spPr>
+          <a:xfrm>
+            <a:off x="1892300" y="40258"/>
+            <a:ext cx="3571875" cy="5372100"/>
+          </a:xfrm>
+          <a:prstGeom prst="rect">
+            <a:avLst/>
+          </a:prstGeom>
+        </p:spPr>
+      </p:pic>
+      <p:sp>
+        <p:nvSpPr>
+          <p:cNvPr id="8" name="제목 2">
+            <a:extLst>
+              <a:ext uri="{FF2B5EF4-FFF2-40B4-BE49-F238E27FC236}">
+                <a16:creationId xmlns:a16="http://schemas.microsoft.com/office/drawing/2014/main" id="{FC547653-1C13-7DF3-ADD4-8237D7AD00AD}"/>
+              </a:ext>
+            </a:extLst>
+          </p:cNvPr>
+          <p:cNvSpPr txBox="1">
+            <a:spLocks/>
+          </p:cNvSpPr>
+          <p:nvPr/>
+        </p:nvSpPr>
+        <p:spPr>
+          <a:xfrm>
+            <a:off x="5464174" y="225838"/>
+            <a:ext cx="3816985" cy="535531"/>
+          </a:xfrm>
+          <a:prstGeom prst="rect">
+            <a:avLst/>
+          </a:prstGeom>
+        </p:spPr>
+        <p:txBody>
+          <a:bodyPr vert="horz" wrap="square" lIns="91440" tIns="45720" rIns="91440" bIns="45720" rtlCol="0" anchor="t">
+            <a:spAutoFit/>
+          </a:bodyPr>
+          <a:lstStyle>
+            <a:lvl1pPr algn="l" defTabSz="914400" rtl="0" eaLnBrk="1" latinLnBrk="0" hangingPunct="1">
+              <a:lnSpc>
+                <a:spcPct val="90000"/>
+              </a:lnSpc>
+              <a:spcBef>
+                <a:spcPct val="0"/>
+              </a:spcBef>
+              <a:buNone/>
+              <a:defRPr sz="3200" b="1" kern="1200">
+                <a:solidFill>
+                  <a:schemeClr val="tx1"/>
+                </a:solidFill>
+                <a:latin typeface="+mj-lt"/>
+                <a:ea typeface="+mj-ea"/>
+                <a:cs typeface="+mj-cs"/>
+              </a:defRPr>
+            </a:lvl1pPr>
+          </a:lstStyle>
+          <a:p>
+            <a:r>
+              <a:rPr lang="en-US" altLang="ko-KR" b="0" dirty="0"/>
+              <a:t>137, 142, 313</a:t>
+            </a:r>
+            <a:endParaRPr lang="ko-KR" altLang="en-US" b="0" dirty="0"/>
+          </a:p>
+        </p:txBody>
+      </p:sp>
+    </p:spTree>
+    <p:extLst>
+      <p:ext uri="{BB962C8B-B14F-4D97-AF65-F5344CB8AC3E}">
+        <p14:creationId xmlns:p14="http://schemas.microsoft.com/office/powerpoint/2010/main" val="504483618"/>
+      </p:ext>
+    </p:extLst>
+  </p:cSld>
+  <p:clrMapOvr>
+    <a:masterClrMapping/>
+  </p:clrMapOvr>
+</p:sld>
+</file>
+
+<file path=ppt/slides/slide3.xml><?xml version="1.0" encoding="utf-8"?>
+<p:sld xmlns:a="http://schemas.openxmlformats.org/drawingml/2006/main" xmlns:r="http://schemas.openxmlformats.org/officeDocument/2006/relationships" xmlns:p="http://schemas.openxmlformats.org/presentationml/2006/main">
+  <p:cSld>
+    <p:spTree>
+      <p:nvGrpSpPr>
         <p:cNvPr id="1" name="">
           <a:extLst>
             <a:ext uri="{FF2B5EF4-FFF2-40B4-BE49-F238E27FC236}">
@@ -5340,7 +5568,7 @@
           <a:p>
             <a:fld id="{2A226FEB-661D-4181-84CB-C53DCFE1931A}" type="slidenum">
               <a:rPr lang="ko-KR" altLang="en-US" smtClean="0"/>
-              <a:t>2</a:t>
+              <a:t>3</a:t>
             </a:fld>
             <a:endParaRPr lang="ko-KR" altLang="en-US"/>
           </a:p>
@@ -9904,8 +10132,8 @@
             <a:chExt cx="499680" cy="821520"/>
           </a:xfrm>
         </p:grpSpPr>
-        <mc:AlternateContent xmlns:mc="http://schemas.openxmlformats.org/markup-compatibility/2006">
-          <mc:Choice xmlns:p14="http://schemas.microsoft.com/office/powerpoint/2010/main" Requires="p14">
+        <mc:AlternateContent xmlns:mc="http://schemas.openxmlformats.org/markup-compatibility/2006" xmlns:p14="http://schemas.microsoft.com/office/powerpoint/2010/main">
+          <mc:Choice Requires="p14">
             <p:contentPart p14:bwMode="auto" r:id="rId20">
               <p14:nvContentPartPr>
                 <p14:cNvPr id="32" name="잉크 31">
@@ -9924,7 +10152,7 @@
               </p14:xfrm>
             </p:contentPart>
           </mc:Choice>
-          <mc:Fallback>
+          <mc:Fallback xmlns="">
             <p:pic>
               <p:nvPicPr>
                 <p:cNvPr id="32" name="잉크 31">
@@ -10020,7 +10248,7 @@
 </p:sld>
 </file>
 
-<file path=ppt/slides/slide3.xml><?xml version="1.0" encoding="utf-8"?>
+<file path=ppt/slides/slide4.xml><?xml version="1.0" encoding="utf-8"?>
 <p:sld xmlns:a="http://schemas.openxmlformats.org/drawingml/2006/main" xmlns:r="http://schemas.openxmlformats.org/officeDocument/2006/relationships" xmlns:p="http://schemas.openxmlformats.org/presentationml/2006/main">
   <p:cSld>
     <p:spTree>
@@ -10138,7 +10366,7 @@
           <a:p>
             <a:fld id="{2A226FEB-661D-4181-84CB-C53DCFE1931A}" type="slidenum">
               <a:rPr lang="ko-KR" altLang="en-US" smtClean="0"/>
-              <a:t>3</a:t>
+              <a:t>4</a:t>
             </a:fld>
             <a:endParaRPr lang="ko-KR" altLang="en-US"/>
           </a:p>
@@ -10193,7 +10421,7 @@
 </p:sld>
 </file>
 
-<file path=ppt/slides/slide4.xml><?xml version="1.0" encoding="utf-8"?>
+<file path=ppt/slides/slide5.xml><?xml version="1.0" encoding="utf-8"?>
 <p:sld xmlns:a="http://schemas.openxmlformats.org/drawingml/2006/main" xmlns:r="http://schemas.openxmlformats.org/officeDocument/2006/relationships" xmlns:p="http://schemas.openxmlformats.org/presentationml/2006/main">
   <p:cSld>
     <p:spTree>
@@ -10964,7 +11192,7 @@
           <a:p>
             <a:fld id="{2A226FEB-661D-4181-84CB-C53DCFE1931A}" type="slidenum">
               <a:rPr lang="ko-KR" altLang="en-US" smtClean="0"/>
-              <a:t>4</a:t>
+              <a:t>5</a:t>
             </a:fld>
             <a:endParaRPr lang="ko-KR" altLang="en-US"/>
           </a:p>
